--- a/presentations/out/Помощь в принятии лекарств.pptx
+++ b/presentations/out/Помощь в принятии лекарств.pptx
@@ -14,6 +14,10 @@
     <p:sldId id="262" r:id="rId13"/>
     <p:sldId id="263" r:id="rId14"/>
     <p:sldId id="264" r:id="rId15"/>
+    <p:sldId id="265" r:id="rId16"/>
+    <p:sldId id="266" r:id="rId17"/>
+    <p:sldId id="267" r:id="rId18"/>
+    <p:sldId id="268" r:id="rId19"/>
   </p:sldIdLst>
   <p:sldSz cx="12191695" cy="6858000" type="screen4x3"/>
   <p:notesSz cx="6858000" cy="9144000"/>
@@ -3351,6 +3355,1824 @@
 </p:sld>
 </file>
 
+<file path=ppt/slides/slide10.xml><?xml version="1.0" encoding="utf-8"?>
+<p:sld xmlns:a="http://schemas.openxmlformats.org/drawingml/2006/main" xmlns:p="http://schemas.openxmlformats.org/presentationml/2006/main" xmlns:r="http://schemas.openxmlformats.org/officeDocument/2006/relationships">
+  <p:cSld>
+    <p:spTree>
+      <p:nvGrpSpPr>
+        <p:cNvPr id="1" name=""/>
+        <p:cNvGrpSpPr/>
+        <p:nvPr/>
+      </p:nvGrpSpPr>
+      <p:grpSpPr/>
+      <p:sp>
+        <p:nvSpPr>
+          <p:cNvPr id="2" name="Rectangle 1"/>
+          <p:cNvSpPr/>
+          <p:nvPr/>
+        </p:nvSpPr>
+        <p:spPr>
+          <a:xfrm>
+            <a:off x="0" y="0"/>
+            <a:ext cx="12191695" cy="6858000"/>
+          </a:xfrm>
+          <a:prstGeom prst="rect">
+            <a:avLst/>
+          </a:prstGeom>
+          <a:solidFill>
+            <a:srgbClr val="FFFFFF"/>
+          </a:solidFill>
+          <a:ln>
+            <a:noFill/>
+          </a:ln>
+        </p:spPr>
+        <p:style>
+          <a:lnRef idx="1">
+            <a:schemeClr val="accent1"/>
+          </a:lnRef>
+          <a:fillRef idx="3">
+            <a:schemeClr val="accent1"/>
+          </a:fillRef>
+          <a:effectRef idx="2">
+            <a:schemeClr val="accent1"/>
+          </a:effectRef>
+          <a:fontRef idx="minor">
+            <a:schemeClr val="lt1"/>
+          </a:fontRef>
+        </p:style>
+        <p:txBody>
+          <a:bodyPr rtlCol="0" anchor="ctr"/>
+          <a:lstStyle/>
+          <a:p>
+            <a:pPr algn="ctr"/>
+          </a:p>
+        </p:txBody>
+      </p:sp>
+      <p:sp>
+        <p:nvSpPr>
+          <p:cNvPr id="3" name="TextBox 2"/>
+          <p:cNvSpPr txBox="1"/>
+          <p:nvPr/>
+        </p:nvSpPr>
+        <p:spPr>
+          <a:xfrm>
+            <a:off x="700000" y="250000"/>
+            <a:ext cx="11200000" cy="550000"/>
+          </a:xfrm>
+          <a:prstGeom prst="rect">
+            <a:avLst/>
+          </a:prstGeom>
+          <a:noFill/>
+        </p:spPr>
+        <p:txBody>
+          <a:bodyPr wrap="square" anchor="t">
+            <a:spAutoFit/>
+          </a:bodyPr>
+          <a:lstStyle/>
+          <a:p>
+            <a:pPr algn="l"/>
+            <a:r>
+              <a:rPr sz="2200" b="1">
+                <a:solidFill>
+                  <a:srgbClr val="333333"/>
+                </a:solidFill>
+                <a:latin typeface="Open Sans"/>
+                <a:ea typeface="Open Sans"/>
+                <a:cs typeface="Open Sans"/>
+              </a:rPr>
+              <a:t>ЧТО ПЕРЕДАТЬ МЕДИЦИНСКИМ СПЕЦИАЛИСТАМ</a:t>
+            </a:r>
+          </a:p>
+        </p:txBody>
+      </p:sp>
+      <p:sp>
+        <p:nvSpPr>
+          <p:cNvPr id="4" name="Rectangle 3"/>
+          <p:cNvSpPr/>
+          <p:nvPr/>
+        </p:nvSpPr>
+        <p:spPr>
+          <a:xfrm>
+            <a:off x="700000" y="850000"/>
+            <a:ext cx="9000000" cy="28000"/>
+          </a:xfrm>
+          <a:prstGeom prst="rect">
+            <a:avLst/>
+          </a:prstGeom>
+          <a:solidFill>
+            <a:srgbClr val="555555"/>
+          </a:solidFill>
+          <a:ln>
+            <a:noFill/>
+          </a:ln>
+        </p:spPr>
+        <p:style>
+          <a:lnRef idx="1">
+            <a:schemeClr val="accent1"/>
+          </a:lnRef>
+          <a:fillRef idx="3">
+            <a:schemeClr val="accent1"/>
+          </a:fillRef>
+          <a:effectRef idx="2">
+            <a:schemeClr val="accent1"/>
+          </a:effectRef>
+          <a:fontRef idx="minor">
+            <a:schemeClr val="lt1"/>
+          </a:fontRef>
+        </p:style>
+        <p:txBody>
+          <a:bodyPr rtlCol="0" anchor="ctr"/>
+          <a:lstStyle/>
+          <a:p>
+            <a:pPr algn="ctr"/>
+          </a:p>
+        </p:txBody>
+      </p:sp>
+      <p:sp>
+        <p:nvSpPr>
+          <p:cNvPr id="5" name="TextBox 4"/>
+          <p:cNvSpPr txBox="1"/>
+          <p:nvPr/>
+        </p:nvSpPr>
+        <p:spPr>
+          <a:xfrm>
+            <a:off x="700000" y="920000"/>
+            <a:ext cx="11000000" cy="350000"/>
+          </a:xfrm>
+          <a:prstGeom prst="rect">
+            <a:avLst/>
+          </a:prstGeom>
+          <a:noFill/>
+        </p:spPr>
+        <p:txBody>
+          <a:bodyPr wrap="square" anchor="t">
+            <a:spAutoFit/>
+          </a:bodyPr>
+          <a:lstStyle/>
+          <a:p>
+            <a:pPr algn="l"/>
+            <a:r>
+              <a:rPr sz="1200" b="0">
+                <a:solidFill>
+                  <a:srgbClr val="666666"/>
+                </a:solidFill>
+                <a:latin typeface="Open Sans"/>
+                <a:ea typeface="Open Sans"/>
+                <a:cs typeface="Open Sans"/>
+              </a:rPr>
+              <a:t>Оказание первой помощи при травмах, ранениях и поражениях, прочих состояниях</a:t>
+            </a:r>
+          </a:p>
+        </p:txBody>
+      </p:sp>
+      <p:sp>
+        <p:nvSpPr>
+          <p:cNvPr id="6" name="Rectangle 5"/>
+          <p:cNvSpPr/>
+          <p:nvPr/>
+        </p:nvSpPr>
+        <p:spPr>
+          <a:xfrm>
+            <a:off x="0" y="2800000"/>
+            <a:ext cx="420000" cy="420000"/>
+          </a:xfrm>
+          <a:prstGeom prst="rect">
+            <a:avLst/>
+          </a:prstGeom>
+          <a:solidFill>
+            <a:srgbClr val="555555"/>
+          </a:solidFill>
+          <a:ln>
+            <a:noFill/>
+          </a:ln>
+        </p:spPr>
+        <p:style>
+          <a:lnRef idx="1">
+            <a:schemeClr val="accent1"/>
+          </a:lnRef>
+          <a:fillRef idx="3">
+            <a:schemeClr val="accent1"/>
+          </a:fillRef>
+          <a:effectRef idx="2">
+            <a:schemeClr val="accent1"/>
+          </a:effectRef>
+          <a:fontRef idx="minor">
+            <a:schemeClr val="lt1"/>
+          </a:fontRef>
+        </p:style>
+        <p:txBody>
+          <a:bodyPr rtlCol="0" anchor="ctr"/>
+          <a:lstStyle/>
+          <a:p>
+            <a:pPr algn="ctr"/>
+          </a:p>
+        </p:txBody>
+      </p:sp>
+      <p:sp>
+        <p:nvSpPr>
+          <p:cNvPr id="7" name="TextBox 6"/>
+          <p:cNvSpPr txBox="1"/>
+          <p:nvPr/>
+        </p:nvSpPr>
+        <p:spPr>
+          <a:xfrm>
+            <a:off x="0" y="2800000"/>
+            <a:ext cx="420000" cy="420000"/>
+          </a:xfrm>
+          <a:prstGeom prst="rect">
+            <a:avLst/>
+          </a:prstGeom>
+          <a:noFill/>
+        </p:spPr>
+        <p:txBody>
+          <a:bodyPr wrap="square" anchor="ctr">
+            <a:spAutoFit/>
+          </a:bodyPr>
+          <a:lstStyle/>
+          <a:p>
+            <a:pPr algn="ctr"/>
+            <a:r>
+              <a:rPr sz="1400" b="1">
+                <a:solidFill>
+                  <a:srgbClr val="FFFFFF"/>
+                </a:solidFill>
+                <a:latin typeface="Open Sans"/>
+                <a:ea typeface="Open Sans"/>
+                <a:cs typeface="Open Sans"/>
+              </a:rPr>
+              <a:t>10</a:t>
+            </a:r>
+          </a:p>
+        </p:txBody>
+      </p:sp>
+      <p:sp>
+        <p:nvSpPr>
+          <p:cNvPr id="8" name="TextBox 7"/>
+          <p:cNvSpPr txBox="1"/>
+          <p:nvPr/>
+        </p:nvSpPr>
+        <p:spPr>
+          <a:xfrm>
+            <a:off x="700000" y="1450000"/>
+            <a:ext cx="11000000" cy="4000000"/>
+          </a:xfrm>
+          <a:prstGeom prst="rect">
+            <a:avLst/>
+          </a:prstGeom>
+          <a:noFill/>
+        </p:spPr>
+        <p:txBody>
+          <a:bodyPr wrap="square">
+            <a:spAutoFit/>
+          </a:bodyPr>
+          <a:lstStyle/>
+          <a:p>
+            <a:pPr algn="l">
+              <a:spcAft>
+                <a:spcPts val="800"/>
+              </a:spcAft>
+            </a:pPr>
+            <a:r>
+              <a:rPr sz="1400" b="0">
+                <a:solidFill>
+                  <a:srgbClr val="333333"/>
+                </a:solidFill>
+                <a:latin typeface="Open Sans"/>
+                <a:ea typeface="Open Sans"/>
+                <a:cs typeface="Open Sans"/>
+              </a:rPr>
+              <a:t>•  Какое состояние возникло и что сообщил сам пострадавший.</a:t>
+            </a:r>
+          </a:p>
+          <a:p>
+            <a:pPr algn="l">
+              <a:spcAft>
+                <a:spcPts val="800"/>
+              </a:spcAft>
+            </a:pPr>
+            <a:r>
+              <a:rPr sz="1400" b="0">
+                <a:solidFill>
+                  <a:srgbClr val="333333"/>
+                </a:solidFill>
+                <a:latin typeface="Open Sans"/>
+                <a:ea typeface="Open Sans"/>
+                <a:cs typeface="Open Sans"/>
+              </a:rPr>
+              <a:t>•  Название и форма лекарственного препарата.</a:t>
+            </a:r>
+          </a:p>
+          <a:p>
+            <a:pPr algn="l">
+              <a:spcAft>
+                <a:spcPts val="800"/>
+              </a:spcAft>
+            </a:pPr>
+            <a:r>
+              <a:rPr sz="1400" b="0">
+                <a:solidFill>
+                  <a:srgbClr val="333333"/>
+                </a:solidFill>
+                <a:latin typeface="Open Sans"/>
+                <a:ea typeface="Open Sans"/>
+                <a:cs typeface="Open Sans"/>
+              </a:rPr>
+              <a:t>•  Какая доза и каким способом была принята.</a:t>
+            </a:r>
+          </a:p>
+          <a:p>
+            <a:pPr algn="l">
+              <a:spcAft>
+                <a:spcPts val="800"/>
+              </a:spcAft>
+            </a:pPr>
+            <a:r>
+              <a:rPr sz="1400" b="0">
+                <a:solidFill>
+                  <a:srgbClr val="333333"/>
+                </a:solidFill>
+                <a:latin typeface="Open Sans"/>
+                <a:ea typeface="Open Sans"/>
+                <a:cs typeface="Open Sans"/>
+              </a:rPr>
+              <a:t>•  Точное или примерное время приема.</a:t>
+            </a:r>
+          </a:p>
+          <a:p>
+            <a:pPr algn="l">
+              <a:spcAft>
+                <a:spcPts val="800"/>
+              </a:spcAft>
+            </a:pPr>
+            <a:r>
+              <a:rPr sz="1400" b="0">
+                <a:solidFill>
+                  <a:srgbClr val="333333"/>
+                </a:solidFill>
+                <a:latin typeface="Open Sans"/>
+                <a:ea typeface="Open Sans"/>
+                <a:cs typeface="Open Sans"/>
+              </a:rPr>
+              <a:t>•  Как изменилось состояние после лекарства.</a:t>
+            </a:r>
+          </a:p>
+          <a:p>
+            <a:pPr algn="l">
+              <a:spcAft>
+                <a:spcPts val="800"/>
+              </a:spcAft>
+            </a:pPr>
+            <a:r>
+              <a:rPr sz="1400" b="0">
+                <a:solidFill>
+                  <a:srgbClr val="333333"/>
+                </a:solidFill>
+                <a:latin typeface="Open Sans"/>
+                <a:ea typeface="Open Sans"/>
+                <a:cs typeface="Open Sans"/>
+              </a:rPr>
+              <a:t>•  Какая еще первая помощь была оказана.</a:t>
+            </a:r>
+          </a:p>
+        </p:txBody>
+      </p:sp>
+      <p:sp>
+        <p:nvSpPr>
+          <p:cNvPr id="9" name="Rounded Rectangle 8"/>
+          <p:cNvSpPr/>
+          <p:nvPr/>
+        </p:nvSpPr>
+        <p:spPr>
+          <a:xfrm>
+            <a:off x="700000" y="5600000"/>
+            <a:ext cx="11000000" cy="1000000"/>
+          </a:xfrm>
+          <a:prstGeom prst="roundRect">
+            <a:avLst/>
+          </a:prstGeom>
+          <a:solidFill>
+            <a:srgbClr val="F5F0E1"/>
+          </a:solidFill>
+          <a:ln>
+            <a:noFill/>
+          </a:ln>
+        </p:spPr>
+        <p:style>
+          <a:lnRef idx="1">
+            <a:schemeClr val="accent1"/>
+          </a:lnRef>
+          <a:fillRef idx="3">
+            <a:schemeClr val="accent1"/>
+          </a:fillRef>
+          <a:effectRef idx="2">
+            <a:schemeClr val="accent1"/>
+          </a:effectRef>
+          <a:fontRef idx="minor">
+            <a:schemeClr val="lt1"/>
+          </a:fontRef>
+        </p:style>
+        <p:txBody>
+          <a:bodyPr rtlCol="0" anchor="ctr"/>
+          <a:lstStyle/>
+          <a:p>
+            <a:pPr algn="ctr"/>
+          </a:p>
+        </p:txBody>
+      </p:sp>
+      <p:sp>
+        <p:nvSpPr>
+          <p:cNvPr id="10" name="TextBox 9"/>
+          <p:cNvSpPr txBox="1"/>
+          <p:nvPr/>
+        </p:nvSpPr>
+        <p:spPr>
+          <a:xfrm>
+            <a:off x="950000" y="5800000"/>
+            <a:ext cx="10500000" cy="600000"/>
+          </a:xfrm>
+          <a:prstGeom prst="rect">
+            <a:avLst/>
+          </a:prstGeom>
+          <a:noFill/>
+        </p:spPr>
+        <p:txBody>
+          <a:bodyPr wrap="square" anchor="ctr">
+            <a:spAutoFit/>
+          </a:bodyPr>
+          <a:lstStyle/>
+          <a:p>
+            <a:pPr algn="l"/>
+            <a:r>
+              <a:rPr sz="1200" b="0">
+                <a:solidFill>
+                  <a:srgbClr val="333333"/>
+                </a:solidFill>
+                <a:latin typeface="Open Sans"/>
+                <a:ea typeface="Open Sans"/>
+                <a:cs typeface="Open Sans"/>
+              </a:rPr>
+              <a:t>Если сведения неизвестны, прямо сообщите об этом.</a:t>
+            </a:r>
+          </a:p>
+        </p:txBody>
+      </p:sp>
+    </p:spTree>
+  </p:cSld>
+  <p:clrMapOvr>
+    <a:masterClrMapping/>
+  </p:clrMapOvr>
+</p:sld>
+</file>
+
+<file path=ppt/slides/slide11.xml><?xml version="1.0" encoding="utf-8"?>
+<p:sld xmlns:a="http://schemas.openxmlformats.org/drawingml/2006/main" xmlns:p="http://schemas.openxmlformats.org/presentationml/2006/main" xmlns:r="http://schemas.openxmlformats.org/officeDocument/2006/relationships">
+  <p:cSld>
+    <p:spTree>
+      <p:nvGrpSpPr>
+        <p:cNvPr id="1" name=""/>
+        <p:cNvGrpSpPr/>
+        <p:nvPr/>
+      </p:nvGrpSpPr>
+      <p:grpSpPr/>
+      <p:sp>
+        <p:nvSpPr>
+          <p:cNvPr id="2" name="Rectangle 1"/>
+          <p:cNvSpPr/>
+          <p:nvPr/>
+        </p:nvSpPr>
+        <p:spPr>
+          <a:xfrm>
+            <a:off x="0" y="0"/>
+            <a:ext cx="12191695" cy="6858000"/>
+          </a:xfrm>
+          <a:prstGeom prst="rect">
+            <a:avLst/>
+          </a:prstGeom>
+          <a:solidFill>
+            <a:srgbClr val="FFFFFF"/>
+          </a:solidFill>
+          <a:ln>
+            <a:noFill/>
+          </a:ln>
+        </p:spPr>
+        <p:style>
+          <a:lnRef idx="1">
+            <a:schemeClr val="accent1"/>
+          </a:lnRef>
+          <a:fillRef idx="3">
+            <a:schemeClr val="accent1"/>
+          </a:fillRef>
+          <a:effectRef idx="2">
+            <a:schemeClr val="accent1"/>
+          </a:effectRef>
+          <a:fontRef idx="minor">
+            <a:schemeClr val="lt1"/>
+          </a:fontRef>
+        </p:style>
+        <p:txBody>
+          <a:bodyPr rtlCol="0" anchor="ctr"/>
+          <a:lstStyle/>
+          <a:p>
+            <a:pPr algn="ctr"/>
+          </a:p>
+        </p:txBody>
+      </p:sp>
+      <p:sp>
+        <p:nvSpPr>
+          <p:cNvPr id="3" name="TextBox 2"/>
+          <p:cNvSpPr txBox="1"/>
+          <p:nvPr/>
+        </p:nvSpPr>
+        <p:spPr>
+          <a:xfrm>
+            <a:off x="700000" y="250000"/>
+            <a:ext cx="11200000" cy="550000"/>
+          </a:xfrm>
+          <a:prstGeom prst="rect">
+            <a:avLst/>
+          </a:prstGeom>
+          <a:noFill/>
+        </p:spPr>
+        <p:txBody>
+          <a:bodyPr wrap="square" anchor="t">
+            <a:spAutoFit/>
+          </a:bodyPr>
+          <a:lstStyle/>
+          <a:p>
+            <a:pPr algn="l"/>
+            <a:r>
+              <a:rPr sz="2200" b="1">
+                <a:solidFill>
+                  <a:srgbClr val="333333"/>
+                </a:solidFill>
+                <a:latin typeface="Open Sans"/>
+                <a:ea typeface="Open Sans"/>
+                <a:cs typeface="Open Sans"/>
+              </a:rPr>
+              <a:t>ГЛАВНОЕ ЗАПОМНИТЬ</a:t>
+            </a:r>
+          </a:p>
+        </p:txBody>
+      </p:sp>
+      <p:sp>
+        <p:nvSpPr>
+          <p:cNvPr id="4" name="Rectangle 3"/>
+          <p:cNvSpPr/>
+          <p:nvPr/>
+        </p:nvSpPr>
+        <p:spPr>
+          <a:xfrm>
+            <a:off x="700000" y="850000"/>
+            <a:ext cx="9000000" cy="28000"/>
+          </a:xfrm>
+          <a:prstGeom prst="rect">
+            <a:avLst/>
+          </a:prstGeom>
+          <a:solidFill>
+            <a:srgbClr val="555555"/>
+          </a:solidFill>
+          <a:ln>
+            <a:noFill/>
+          </a:ln>
+        </p:spPr>
+        <p:style>
+          <a:lnRef idx="1">
+            <a:schemeClr val="accent1"/>
+          </a:lnRef>
+          <a:fillRef idx="3">
+            <a:schemeClr val="accent1"/>
+          </a:fillRef>
+          <a:effectRef idx="2">
+            <a:schemeClr val="accent1"/>
+          </a:effectRef>
+          <a:fontRef idx="minor">
+            <a:schemeClr val="lt1"/>
+          </a:fontRef>
+        </p:style>
+        <p:txBody>
+          <a:bodyPr rtlCol="0" anchor="ctr"/>
+          <a:lstStyle/>
+          <a:p>
+            <a:pPr algn="ctr"/>
+          </a:p>
+        </p:txBody>
+      </p:sp>
+      <p:sp>
+        <p:nvSpPr>
+          <p:cNvPr id="5" name="TextBox 4"/>
+          <p:cNvSpPr txBox="1"/>
+          <p:nvPr/>
+        </p:nvSpPr>
+        <p:spPr>
+          <a:xfrm>
+            <a:off x="700000" y="920000"/>
+            <a:ext cx="11000000" cy="350000"/>
+          </a:xfrm>
+          <a:prstGeom prst="rect">
+            <a:avLst/>
+          </a:prstGeom>
+          <a:noFill/>
+        </p:spPr>
+        <p:txBody>
+          <a:bodyPr wrap="square" anchor="t">
+            <a:spAutoFit/>
+          </a:bodyPr>
+          <a:lstStyle/>
+          <a:p>
+            <a:pPr algn="l"/>
+            <a:r>
+              <a:rPr sz="1200" b="0">
+                <a:solidFill>
+                  <a:srgbClr val="666666"/>
+                </a:solidFill>
+                <a:latin typeface="Open Sans"/>
+                <a:ea typeface="Open Sans"/>
+                <a:cs typeface="Open Sans"/>
+              </a:rPr>
+              <a:t>Оказание первой помощи при травмах, ранениях и поражениях, прочих состояниях</a:t>
+            </a:r>
+          </a:p>
+        </p:txBody>
+      </p:sp>
+      <p:sp>
+        <p:nvSpPr>
+          <p:cNvPr id="6" name="Rectangle 5"/>
+          <p:cNvSpPr/>
+          <p:nvPr/>
+        </p:nvSpPr>
+        <p:spPr>
+          <a:xfrm>
+            <a:off x="0" y="2800000"/>
+            <a:ext cx="420000" cy="420000"/>
+          </a:xfrm>
+          <a:prstGeom prst="rect">
+            <a:avLst/>
+          </a:prstGeom>
+          <a:solidFill>
+            <a:srgbClr val="555555"/>
+          </a:solidFill>
+          <a:ln>
+            <a:noFill/>
+          </a:ln>
+        </p:spPr>
+        <p:style>
+          <a:lnRef idx="1">
+            <a:schemeClr val="accent1"/>
+          </a:lnRef>
+          <a:fillRef idx="3">
+            <a:schemeClr val="accent1"/>
+          </a:fillRef>
+          <a:effectRef idx="2">
+            <a:schemeClr val="accent1"/>
+          </a:effectRef>
+          <a:fontRef idx="minor">
+            <a:schemeClr val="lt1"/>
+          </a:fontRef>
+        </p:style>
+        <p:txBody>
+          <a:bodyPr rtlCol="0" anchor="ctr"/>
+          <a:lstStyle/>
+          <a:p>
+            <a:pPr algn="ctr"/>
+          </a:p>
+        </p:txBody>
+      </p:sp>
+      <p:sp>
+        <p:nvSpPr>
+          <p:cNvPr id="7" name="TextBox 6"/>
+          <p:cNvSpPr txBox="1"/>
+          <p:nvPr/>
+        </p:nvSpPr>
+        <p:spPr>
+          <a:xfrm>
+            <a:off x="0" y="2800000"/>
+            <a:ext cx="420000" cy="420000"/>
+          </a:xfrm>
+          <a:prstGeom prst="rect">
+            <a:avLst/>
+          </a:prstGeom>
+          <a:noFill/>
+        </p:spPr>
+        <p:txBody>
+          <a:bodyPr wrap="square" anchor="ctr">
+            <a:spAutoFit/>
+          </a:bodyPr>
+          <a:lstStyle/>
+          <a:p>
+            <a:pPr algn="ctr"/>
+            <a:r>
+              <a:rPr sz="1400" b="1">
+                <a:solidFill>
+                  <a:srgbClr val="FFFFFF"/>
+                </a:solidFill>
+                <a:latin typeface="Open Sans"/>
+                <a:ea typeface="Open Sans"/>
+                <a:cs typeface="Open Sans"/>
+              </a:rPr>
+              <a:t>11</a:t>
+            </a:r>
+          </a:p>
+        </p:txBody>
+      </p:sp>
+      <p:sp>
+        <p:nvSpPr>
+          <p:cNvPr id="8" name="Rectangle 7"/>
+          <p:cNvSpPr/>
+          <p:nvPr/>
+        </p:nvSpPr>
+        <p:spPr>
+          <a:xfrm>
+            <a:off x="700000" y="1450000"/>
+            <a:ext cx="11000000" cy="850000"/>
+          </a:xfrm>
+          <a:prstGeom prst="rect">
+            <a:avLst/>
+          </a:prstGeom>
+          <a:solidFill>
+            <a:srgbClr val="FFFFFF"/>
+          </a:solidFill>
+          <a:ln w="12700">
+            <a:solidFill>
+              <a:srgbClr val="999999"/>
+            </a:solidFill>
+          </a:ln>
+        </p:spPr>
+        <p:style>
+          <a:lnRef idx="1">
+            <a:schemeClr val="accent1"/>
+          </a:lnRef>
+          <a:fillRef idx="3">
+            <a:schemeClr val="accent1"/>
+          </a:fillRef>
+          <a:effectRef idx="2">
+            <a:schemeClr val="accent1"/>
+          </a:effectRef>
+          <a:fontRef idx="minor">
+            <a:schemeClr val="lt1"/>
+          </a:fontRef>
+        </p:style>
+        <p:txBody>
+          <a:bodyPr rtlCol="0" anchor="ctr"/>
+          <a:lstStyle/>
+          <a:p>
+            <a:pPr algn="ctr"/>
+          </a:p>
+        </p:txBody>
+      </p:sp>
+      <p:sp>
+        <p:nvSpPr>
+          <p:cNvPr id="9" name="Rectangle 8"/>
+          <p:cNvSpPr/>
+          <p:nvPr/>
+        </p:nvSpPr>
+        <p:spPr>
+          <a:xfrm>
+            <a:off x="700000" y="1450000"/>
+            <a:ext cx="90000" cy="850000"/>
+          </a:xfrm>
+          <a:prstGeom prst="rect">
+            <a:avLst/>
+          </a:prstGeom>
+          <a:solidFill>
+            <a:srgbClr val="CC0000"/>
+          </a:solidFill>
+          <a:ln>
+            <a:noFill/>
+          </a:ln>
+        </p:spPr>
+        <p:style>
+          <a:lnRef idx="1">
+            <a:schemeClr val="accent1"/>
+          </a:lnRef>
+          <a:fillRef idx="3">
+            <a:schemeClr val="accent1"/>
+          </a:fillRef>
+          <a:effectRef idx="2">
+            <a:schemeClr val="accent1"/>
+          </a:effectRef>
+          <a:fontRef idx="minor">
+            <a:schemeClr val="lt1"/>
+          </a:fontRef>
+        </p:style>
+        <p:txBody>
+          <a:bodyPr rtlCol="0" anchor="ctr"/>
+          <a:lstStyle/>
+          <a:p>
+            <a:pPr algn="ctr"/>
+          </a:p>
+        </p:txBody>
+      </p:sp>
+      <p:sp>
+        <p:nvSpPr>
+          <p:cNvPr id="10" name="TextBox 9"/>
+          <p:cNvSpPr txBox="1"/>
+          <p:nvPr/>
+        </p:nvSpPr>
+        <p:spPr>
+          <a:xfrm>
+            <a:off x="1000000" y="1530000"/>
+            <a:ext cx="10400000" cy="690000"/>
+          </a:xfrm>
+          <a:prstGeom prst="rect">
+            <a:avLst/>
+          </a:prstGeom>
+          <a:noFill/>
+        </p:spPr>
+        <p:txBody>
+          <a:bodyPr wrap="square" anchor="ctr">
+            <a:spAutoFit/>
+          </a:bodyPr>
+          <a:lstStyle/>
+          <a:p>
+            <a:pPr algn="l"/>
+            <a:r>
+              <a:rPr sz="1300" b="0">
+                <a:solidFill>
+                  <a:srgbClr val="333333"/>
+                </a:solidFill>
+                <a:latin typeface="Open Sans"/>
+                <a:ea typeface="Open Sans"/>
+                <a:cs typeface="Open Sans"/>
+              </a:rPr>
+              <a:t>Только лекарство самого пострадавшего</a:t>
+            </a:r>
+          </a:p>
+        </p:txBody>
+      </p:sp>
+      <p:sp>
+        <p:nvSpPr>
+          <p:cNvPr id="11" name="Rectangle 10"/>
+          <p:cNvSpPr/>
+          <p:nvPr/>
+        </p:nvSpPr>
+        <p:spPr>
+          <a:xfrm>
+            <a:off x="700000" y="2380000"/>
+            <a:ext cx="11000000" cy="850000"/>
+          </a:xfrm>
+          <a:prstGeom prst="rect">
+            <a:avLst/>
+          </a:prstGeom>
+          <a:solidFill>
+            <a:srgbClr val="FFFFFF"/>
+          </a:solidFill>
+          <a:ln w="12700">
+            <a:solidFill>
+              <a:srgbClr val="999999"/>
+            </a:solidFill>
+          </a:ln>
+        </p:spPr>
+        <p:style>
+          <a:lnRef idx="1">
+            <a:schemeClr val="accent1"/>
+          </a:lnRef>
+          <a:fillRef idx="3">
+            <a:schemeClr val="accent1"/>
+          </a:fillRef>
+          <a:effectRef idx="2">
+            <a:schemeClr val="accent1"/>
+          </a:effectRef>
+          <a:fontRef idx="minor">
+            <a:schemeClr val="lt1"/>
+          </a:fontRef>
+        </p:style>
+        <p:txBody>
+          <a:bodyPr rtlCol="0" anchor="ctr"/>
+          <a:lstStyle/>
+          <a:p>
+            <a:pPr algn="ctr"/>
+          </a:p>
+        </p:txBody>
+      </p:sp>
+      <p:sp>
+        <p:nvSpPr>
+          <p:cNvPr id="12" name="Rectangle 11"/>
+          <p:cNvSpPr/>
+          <p:nvPr/>
+        </p:nvSpPr>
+        <p:spPr>
+          <a:xfrm>
+            <a:off x="700000" y="2380000"/>
+            <a:ext cx="90000" cy="850000"/>
+          </a:xfrm>
+          <a:prstGeom prst="rect">
+            <a:avLst/>
+          </a:prstGeom>
+          <a:solidFill>
+            <a:srgbClr val="CC0000"/>
+          </a:solidFill>
+          <a:ln>
+            <a:noFill/>
+          </a:ln>
+        </p:spPr>
+        <p:style>
+          <a:lnRef idx="1">
+            <a:schemeClr val="accent1"/>
+          </a:lnRef>
+          <a:fillRef idx="3">
+            <a:schemeClr val="accent1"/>
+          </a:fillRef>
+          <a:effectRef idx="2">
+            <a:schemeClr val="accent1"/>
+          </a:effectRef>
+          <a:fontRef idx="minor">
+            <a:schemeClr val="lt1"/>
+          </a:fontRef>
+        </p:style>
+        <p:txBody>
+          <a:bodyPr rtlCol="0" anchor="ctr"/>
+          <a:lstStyle/>
+          <a:p>
+            <a:pPr algn="ctr"/>
+          </a:p>
+        </p:txBody>
+      </p:sp>
+      <p:sp>
+        <p:nvSpPr>
+          <p:cNvPr id="13" name="TextBox 12"/>
+          <p:cNvSpPr txBox="1"/>
+          <p:nvPr/>
+        </p:nvSpPr>
+        <p:spPr>
+          <a:xfrm>
+            <a:off x="1000000" y="2460000"/>
+            <a:ext cx="10400000" cy="690000"/>
+          </a:xfrm>
+          <a:prstGeom prst="rect">
+            <a:avLst/>
+          </a:prstGeom>
+          <a:noFill/>
+        </p:spPr>
+        <p:txBody>
+          <a:bodyPr wrap="square" anchor="ctr">
+            <a:spAutoFit/>
+          </a:bodyPr>
+          <a:lstStyle/>
+          <a:p>
+            <a:pPr algn="l"/>
+            <a:r>
+              <a:rPr sz="1300" b="0">
+                <a:solidFill>
+                  <a:srgbClr val="333333"/>
+                </a:solidFill>
+                <a:latin typeface="Open Sans"/>
+                <a:ea typeface="Open Sans"/>
+                <a:cs typeface="Open Sans"/>
+              </a:rPr>
+              <a:t>Только ранее назначенное ему врачом</a:t>
+            </a:r>
+          </a:p>
+        </p:txBody>
+      </p:sp>
+      <p:sp>
+        <p:nvSpPr>
+          <p:cNvPr id="14" name="Rectangle 13"/>
+          <p:cNvSpPr/>
+          <p:nvPr/>
+        </p:nvSpPr>
+        <p:spPr>
+          <a:xfrm>
+            <a:off x="700000" y="3310000"/>
+            <a:ext cx="11000000" cy="850000"/>
+          </a:xfrm>
+          <a:prstGeom prst="rect">
+            <a:avLst/>
+          </a:prstGeom>
+          <a:solidFill>
+            <a:srgbClr val="FFFFFF"/>
+          </a:solidFill>
+          <a:ln w="12700">
+            <a:solidFill>
+              <a:srgbClr val="999999"/>
+            </a:solidFill>
+          </a:ln>
+        </p:spPr>
+        <p:style>
+          <a:lnRef idx="1">
+            <a:schemeClr val="accent1"/>
+          </a:lnRef>
+          <a:fillRef idx="3">
+            <a:schemeClr val="accent1"/>
+          </a:fillRef>
+          <a:effectRef idx="2">
+            <a:schemeClr val="accent1"/>
+          </a:effectRef>
+          <a:fontRef idx="minor">
+            <a:schemeClr val="lt1"/>
+          </a:fontRef>
+        </p:style>
+        <p:txBody>
+          <a:bodyPr rtlCol="0" anchor="ctr"/>
+          <a:lstStyle/>
+          <a:p>
+            <a:pPr algn="ctr"/>
+          </a:p>
+        </p:txBody>
+      </p:sp>
+      <p:sp>
+        <p:nvSpPr>
+          <p:cNvPr id="15" name="Rectangle 14"/>
+          <p:cNvSpPr/>
+          <p:nvPr/>
+        </p:nvSpPr>
+        <p:spPr>
+          <a:xfrm>
+            <a:off x="700000" y="3310000"/>
+            <a:ext cx="90000" cy="850000"/>
+          </a:xfrm>
+          <a:prstGeom prst="rect">
+            <a:avLst/>
+          </a:prstGeom>
+          <a:solidFill>
+            <a:srgbClr val="CC0000"/>
+          </a:solidFill>
+          <a:ln>
+            <a:noFill/>
+          </a:ln>
+        </p:spPr>
+        <p:style>
+          <a:lnRef idx="1">
+            <a:schemeClr val="accent1"/>
+          </a:lnRef>
+          <a:fillRef idx="3">
+            <a:schemeClr val="accent1"/>
+          </a:fillRef>
+          <a:effectRef idx="2">
+            <a:schemeClr val="accent1"/>
+          </a:effectRef>
+          <a:fontRef idx="minor">
+            <a:schemeClr val="lt1"/>
+          </a:fontRef>
+        </p:style>
+        <p:txBody>
+          <a:bodyPr rtlCol="0" anchor="ctr"/>
+          <a:lstStyle/>
+          <a:p>
+            <a:pPr algn="ctr"/>
+          </a:p>
+        </p:txBody>
+      </p:sp>
+      <p:sp>
+        <p:nvSpPr>
+          <p:cNvPr id="16" name="TextBox 15"/>
+          <p:cNvSpPr txBox="1"/>
+          <p:nvPr/>
+        </p:nvSpPr>
+        <p:spPr>
+          <a:xfrm>
+            <a:off x="1000000" y="3390000"/>
+            <a:ext cx="10400000" cy="690000"/>
+          </a:xfrm>
+          <a:prstGeom prst="rect">
+            <a:avLst/>
+          </a:prstGeom>
+          <a:noFill/>
+        </p:spPr>
+        <p:txBody>
+          <a:bodyPr wrap="square" anchor="ctr">
+            <a:spAutoFit/>
+          </a:bodyPr>
+          <a:lstStyle/>
+          <a:p>
+            <a:pPr algn="l"/>
+            <a:r>
+              <a:rPr sz="1300" b="0">
+                <a:solidFill>
+                  <a:srgbClr val="333333"/>
+                </a:solidFill>
+                <a:latin typeface="Open Sans"/>
+                <a:ea typeface="Open Sans"/>
+                <a:cs typeface="Open Sans"/>
+              </a:rPr>
+              <a:t>Только для предусмотренной медицинской цели</a:t>
+            </a:r>
+          </a:p>
+        </p:txBody>
+      </p:sp>
+      <p:sp>
+        <p:nvSpPr>
+          <p:cNvPr id="17" name="Rectangle 16"/>
+          <p:cNvSpPr/>
+          <p:nvPr/>
+        </p:nvSpPr>
+        <p:spPr>
+          <a:xfrm>
+            <a:off x="700000" y="4240000"/>
+            <a:ext cx="11000000" cy="850000"/>
+          </a:xfrm>
+          <a:prstGeom prst="rect">
+            <a:avLst/>
+          </a:prstGeom>
+          <a:solidFill>
+            <a:srgbClr val="FFFFFF"/>
+          </a:solidFill>
+          <a:ln w="12700">
+            <a:solidFill>
+              <a:srgbClr val="999999"/>
+            </a:solidFill>
+          </a:ln>
+        </p:spPr>
+        <p:style>
+          <a:lnRef idx="1">
+            <a:schemeClr val="accent1"/>
+          </a:lnRef>
+          <a:fillRef idx="3">
+            <a:schemeClr val="accent1"/>
+          </a:fillRef>
+          <a:effectRef idx="2">
+            <a:schemeClr val="accent1"/>
+          </a:effectRef>
+          <a:fontRef idx="minor">
+            <a:schemeClr val="lt1"/>
+          </a:fontRef>
+        </p:style>
+        <p:txBody>
+          <a:bodyPr rtlCol="0" anchor="ctr"/>
+          <a:lstStyle/>
+          <a:p>
+            <a:pPr algn="ctr"/>
+          </a:p>
+        </p:txBody>
+      </p:sp>
+      <p:sp>
+        <p:nvSpPr>
+          <p:cNvPr id="18" name="Rectangle 17"/>
+          <p:cNvSpPr/>
+          <p:nvPr/>
+        </p:nvSpPr>
+        <p:spPr>
+          <a:xfrm>
+            <a:off x="700000" y="4240000"/>
+            <a:ext cx="90000" cy="850000"/>
+          </a:xfrm>
+          <a:prstGeom prst="rect">
+            <a:avLst/>
+          </a:prstGeom>
+          <a:solidFill>
+            <a:srgbClr val="CC0000"/>
+          </a:solidFill>
+          <a:ln>
+            <a:noFill/>
+          </a:ln>
+        </p:spPr>
+        <p:style>
+          <a:lnRef idx="1">
+            <a:schemeClr val="accent1"/>
+          </a:lnRef>
+          <a:fillRef idx="3">
+            <a:schemeClr val="accent1"/>
+          </a:fillRef>
+          <a:effectRef idx="2">
+            <a:schemeClr val="accent1"/>
+          </a:effectRef>
+          <a:fontRef idx="minor">
+            <a:schemeClr val="lt1"/>
+          </a:fontRef>
+        </p:style>
+        <p:txBody>
+          <a:bodyPr rtlCol="0" anchor="ctr"/>
+          <a:lstStyle/>
+          <a:p>
+            <a:pPr algn="ctr"/>
+          </a:p>
+        </p:txBody>
+      </p:sp>
+      <p:sp>
+        <p:nvSpPr>
+          <p:cNvPr id="19" name="TextBox 18"/>
+          <p:cNvSpPr txBox="1"/>
+          <p:nvPr/>
+        </p:nvSpPr>
+        <p:spPr>
+          <a:xfrm>
+            <a:off x="1000000" y="4320000"/>
+            <a:ext cx="10400000" cy="690000"/>
+          </a:xfrm>
+          <a:prstGeom prst="rect">
+            <a:avLst/>
+          </a:prstGeom>
+          <a:noFill/>
+        </p:spPr>
+        <p:txBody>
+          <a:bodyPr wrap="square" anchor="ctr">
+            <a:spAutoFit/>
+          </a:bodyPr>
+          <a:lstStyle/>
+          <a:p>
+            <a:pPr algn="l"/>
+            <a:r>
+              <a:rPr sz="1300" b="0">
+                <a:solidFill>
+                  <a:srgbClr val="333333"/>
+                </a:solidFill>
+                <a:latin typeface="Open Sans"/>
+                <a:ea typeface="Open Sans"/>
+                <a:cs typeface="Open Sans"/>
+              </a:rPr>
+              <a:t>Не выбирайте препарат и не изменяйте дозу</a:t>
+            </a:r>
+          </a:p>
+        </p:txBody>
+      </p:sp>
+      <p:sp>
+        <p:nvSpPr>
+          <p:cNvPr id="20" name="Rectangle 19"/>
+          <p:cNvSpPr/>
+          <p:nvPr/>
+        </p:nvSpPr>
+        <p:spPr>
+          <a:xfrm>
+            <a:off x="700000" y="5170000"/>
+            <a:ext cx="11000000" cy="850000"/>
+          </a:xfrm>
+          <a:prstGeom prst="rect">
+            <a:avLst/>
+          </a:prstGeom>
+          <a:solidFill>
+            <a:srgbClr val="FFFFFF"/>
+          </a:solidFill>
+          <a:ln w="12700">
+            <a:solidFill>
+              <a:srgbClr val="999999"/>
+            </a:solidFill>
+          </a:ln>
+        </p:spPr>
+        <p:style>
+          <a:lnRef idx="1">
+            <a:schemeClr val="accent1"/>
+          </a:lnRef>
+          <a:fillRef idx="3">
+            <a:schemeClr val="accent1"/>
+          </a:fillRef>
+          <a:effectRef idx="2">
+            <a:schemeClr val="accent1"/>
+          </a:effectRef>
+          <a:fontRef idx="minor">
+            <a:schemeClr val="lt1"/>
+          </a:fontRef>
+        </p:style>
+        <p:txBody>
+          <a:bodyPr rtlCol="0" anchor="ctr"/>
+          <a:lstStyle/>
+          <a:p>
+            <a:pPr algn="ctr"/>
+          </a:p>
+        </p:txBody>
+      </p:sp>
+      <p:sp>
+        <p:nvSpPr>
+          <p:cNvPr id="21" name="Rectangle 20"/>
+          <p:cNvSpPr/>
+          <p:nvPr/>
+        </p:nvSpPr>
+        <p:spPr>
+          <a:xfrm>
+            <a:off x="700000" y="5170000"/>
+            <a:ext cx="90000" cy="850000"/>
+          </a:xfrm>
+          <a:prstGeom prst="rect">
+            <a:avLst/>
+          </a:prstGeom>
+          <a:solidFill>
+            <a:srgbClr val="CC0000"/>
+          </a:solidFill>
+          <a:ln>
+            <a:noFill/>
+          </a:ln>
+        </p:spPr>
+        <p:style>
+          <a:lnRef idx="1">
+            <a:schemeClr val="accent1"/>
+          </a:lnRef>
+          <a:fillRef idx="3">
+            <a:schemeClr val="accent1"/>
+          </a:fillRef>
+          <a:effectRef idx="2">
+            <a:schemeClr val="accent1"/>
+          </a:effectRef>
+          <a:fontRef idx="minor">
+            <a:schemeClr val="lt1"/>
+          </a:fontRef>
+        </p:style>
+        <p:txBody>
+          <a:bodyPr rtlCol="0" anchor="ctr"/>
+          <a:lstStyle/>
+          <a:p>
+            <a:pPr algn="ctr"/>
+          </a:p>
+        </p:txBody>
+      </p:sp>
+      <p:sp>
+        <p:nvSpPr>
+          <p:cNvPr id="22" name="TextBox 21"/>
+          <p:cNvSpPr txBox="1"/>
+          <p:nvPr/>
+        </p:nvSpPr>
+        <p:spPr>
+          <a:xfrm>
+            <a:off x="1000000" y="5250000"/>
+            <a:ext cx="10400000" cy="690000"/>
+          </a:xfrm>
+          <a:prstGeom prst="rect">
+            <a:avLst/>
+          </a:prstGeom>
+          <a:noFill/>
+        </p:spPr>
+        <p:txBody>
+          <a:bodyPr wrap="square" anchor="ctr">
+            <a:spAutoFit/>
+          </a:bodyPr>
+          <a:lstStyle/>
+          <a:p>
+            <a:pPr algn="l"/>
+            <a:r>
+              <a:rPr sz="1300" b="0">
+                <a:solidFill>
+                  <a:srgbClr val="333333"/>
+                </a:solidFill>
+                <a:latin typeface="Open Sans"/>
+                <a:ea typeface="Open Sans"/>
+                <a:cs typeface="Open Sans"/>
+              </a:rPr>
+              <a:t>Помогите достать, открыть, принять и сообщите специалистам</a:t>
+            </a:r>
+          </a:p>
+        </p:txBody>
+      </p:sp>
+    </p:spTree>
+  </p:cSld>
+  <p:clrMapOvr>
+    <a:masterClrMapping/>
+  </p:clrMapOvr>
+</p:sld>
+</file>
+
+<file path=ppt/slides/slide12.xml><?xml version="1.0" encoding="utf-8"?>
+<p:sld xmlns:a="http://schemas.openxmlformats.org/drawingml/2006/main" xmlns:p="http://schemas.openxmlformats.org/presentationml/2006/main" xmlns:r="http://schemas.openxmlformats.org/officeDocument/2006/relationships">
+  <p:cSld>
+    <p:spTree>
+      <p:nvGrpSpPr>
+        <p:cNvPr id="1" name=""/>
+        <p:cNvGrpSpPr/>
+        <p:nvPr/>
+      </p:nvGrpSpPr>
+      <p:grpSpPr/>
+      <p:sp>
+        <p:nvSpPr>
+          <p:cNvPr id="2" name="Rectangle 1"/>
+          <p:cNvSpPr/>
+          <p:nvPr/>
+        </p:nvSpPr>
+        <p:spPr>
+          <a:xfrm>
+            <a:off x="0" y="0"/>
+            <a:ext cx="12191695" cy="6858000"/>
+          </a:xfrm>
+          <a:prstGeom prst="rect">
+            <a:avLst/>
+          </a:prstGeom>
+          <a:solidFill>
+            <a:srgbClr val="FFFFFF"/>
+          </a:solidFill>
+          <a:ln>
+            <a:noFill/>
+          </a:ln>
+        </p:spPr>
+        <p:style>
+          <a:lnRef idx="1">
+            <a:schemeClr val="accent1"/>
+          </a:lnRef>
+          <a:fillRef idx="3">
+            <a:schemeClr val="accent1"/>
+          </a:fillRef>
+          <a:effectRef idx="2">
+            <a:schemeClr val="accent1"/>
+          </a:effectRef>
+          <a:fontRef idx="minor">
+            <a:schemeClr val="lt1"/>
+          </a:fontRef>
+        </p:style>
+        <p:txBody>
+          <a:bodyPr rtlCol="0" anchor="ctr"/>
+          <a:lstStyle/>
+          <a:p>
+            <a:pPr algn="ctr"/>
+          </a:p>
+        </p:txBody>
+      </p:sp>
+      <p:sp>
+        <p:nvSpPr>
+          <p:cNvPr id="3" name="TextBox 2"/>
+          <p:cNvSpPr txBox="1"/>
+          <p:nvPr/>
+        </p:nvSpPr>
+        <p:spPr>
+          <a:xfrm>
+            <a:off x="700000" y="250000"/>
+            <a:ext cx="11200000" cy="550000"/>
+          </a:xfrm>
+          <a:prstGeom prst="rect">
+            <a:avLst/>
+          </a:prstGeom>
+          <a:noFill/>
+        </p:spPr>
+        <p:txBody>
+          <a:bodyPr wrap="square" anchor="t">
+            <a:spAutoFit/>
+          </a:bodyPr>
+          <a:lstStyle/>
+          <a:p>
+            <a:pPr algn="l"/>
+            <a:r>
+              <a:rPr sz="2200" b="1">
+                <a:solidFill>
+                  <a:srgbClr val="333333"/>
+                </a:solidFill>
+                <a:latin typeface="Open Sans"/>
+                <a:ea typeface="Open Sans"/>
+                <a:cs typeface="Open Sans"/>
+              </a:rPr>
+              <a:t>ПАМЯТКА</a:t>
+            </a:r>
+          </a:p>
+        </p:txBody>
+      </p:sp>
+      <p:sp>
+        <p:nvSpPr>
+          <p:cNvPr id="4" name="Rectangle 3"/>
+          <p:cNvSpPr/>
+          <p:nvPr/>
+        </p:nvSpPr>
+        <p:spPr>
+          <a:xfrm>
+            <a:off x="700000" y="850000"/>
+            <a:ext cx="9000000" cy="28000"/>
+          </a:xfrm>
+          <a:prstGeom prst="rect">
+            <a:avLst/>
+          </a:prstGeom>
+          <a:solidFill>
+            <a:srgbClr val="555555"/>
+          </a:solidFill>
+          <a:ln>
+            <a:noFill/>
+          </a:ln>
+        </p:spPr>
+        <p:style>
+          <a:lnRef idx="1">
+            <a:schemeClr val="accent1"/>
+          </a:lnRef>
+          <a:fillRef idx="3">
+            <a:schemeClr val="accent1"/>
+          </a:fillRef>
+          <a:effectRef idx="2">
+            <a:schemeClr val="accent1"/>
+          </a:effectRef>
+          <a:fontRef idx="minor">
+            <a:schemeClr val="lt1"/>
+          </a:fontRef>
+        </p:style>
+        <p:txBody>
+          <a:bodyPr rtlCol="0" anchor="ctr"/>
+          <a:lstStyle/>
+          <a:p>
+            <a:pPr algn="ctr"/>
+          </a:p>
+        </p:txBody>
+      </p:sp>
+      <p:sp>
+        <p:nvSpPr>
+          <p:cNvPr id="5" name="TextBox 4"/>
+          <p:cNvSpPr txBox="1"/>
+          <p:nvPr/>
+        </p:nvSpPr>
+        <p:spPr>
+          <a:xfrm>
+            <a:off x="700000" y="920000"/>
+            <a:ext cx="11000000" cy="350000"/>
+          </a:xfrm>
+          <a:prstGeom prst="rect">
+            <a:avLst/>
+          </a:prstGeom>
+          <a:noFill/>
+        </p:spPr>
+        <p:txBody>
+          <a:bodyPr wrap="square" anchor="t">
+            <a:spAutoFit/>
+          </a:bodyPr>
+          <a:lstStyle/>
+          <a:p>
+            <a:pPr algn="l"/>
+            <a:r>
+              <a:rPr sz="1200" b="0">
+                <a:solidFill>
+                  <a:srgbClr val="666666"/>
+                </a:solidFill>
+                <a:latin typeface="Open Sans"/>
+                <a:ea typeface="Open Sans"/>
+                <a:cs typeface="Open Sans"/>
+              </a:rPr>
+              <a:t>Оказание первой помощи при травмах, ранениях и поражениях, прочих состояниях</a:t>
+            </a:r>
+          </a:p>
+        </p:txBody>
+      </p:sp>
+      <p:sp>
+        <p:nvSpPr>
+          <p:cNvPr id="6" name="Rectangle 5"/>
+          <p:cNvSpPr/>
+          <p:nvPr/>
+        </p:nvSpPr>
+        <p:spPr>
+          <a:xfrm>
+            <a:off x="0" y="2800000"/>
+            <a:ext cx="420000" cy="420000"/>
+          </a:xfrm>
+          <a:prstGeom prst="rect">
+            <a:avLst/>
+          </a:prstGeom>
+          <a:solidFill>
+            <a:srgbClr val="555555"/>
+          </a:solidFill>
+          <a:ln>
+            <a:noFill/>
+          </a:ln>
+        </p:spPr>
+        <p:style>
+          <a:lnRef idx="1">
+            <a:schemeClr val="accent1"/>
+          </a:lnRef>
+          <a:fillRef idx="3">
+            <a:schemeClr val="accent1"/>
+          </a:fillRef>
+          <a:effectRef idx="2">
+            <a:schemeClr val="accent1"/>
+          </a:effectRef>
+          <a:fontRef idx="minor">
+            <a:schemeClr val="lt1"/>
+          </a:fontRef>
+        </p:style>
+        <p:txBody>
+          <a:bodyPr rtlCol="0" anchor="ctr"/>
+          <a:lstStyle/>
+          <a:p>
+            <a:pPr algn="ctr"/>
+          </a:p>
+        </p:txBody>
+      </p:sp>
+      <p:sp>
+        <p:nvSpPr>
+          <p:cNvPr id="7" name="TextBox 6"/>
+          <p:cNvSpPr txBox="1"/>
+          <p:nvPr/>
+        </p:nvSpPr>
+        <p:spPr>
+          <a:xfrm>
+            <a:off x="0" y="2800000"/>
+            <a:ext cx="420000" cy="420000"/>
+          </a:xfrm>
+          <a:prstGeom prst="rect">
+            <a:avLst/>
+          </a:prstGeom>
+          <a:noFill/>
+        </p:spPr>
+        <p:txBody>
+          <a:bodyPr wrap="square" anchor="ctr">
+            <a:spAutoFit/>
+          </a:bodyPr>
+          <a:lstStyle/>
+          <a:p>
+            <a:pPr algn="ctr"/>
+            <a:r>
+              <a:rPr sz="1400" b="1">
+                <a:solidFill>
+                  <a:srgbClr val="FFFFFF"/>
+                </a:solidFill>
+                <a:latin typeface="Open Sans"/>
+                <a:ea typeface="Open Sans"/>
+                <a:cs typeface="Open Sans"/>
+              </a:rPr>
+              <a:t>12</a:t>
+            </a:r>
+          </a:p>
+        </p:txBody>
+      </p:sp>
+      <p:pic>
+        <p:nvPicPr>
+          <p:cNvPr id="8" name="Picture 7" descr="pamyatka-tema4-lekarstva-16x9.png"/>
+          <p:cNvPicPr>
+            <a:picLocks noChangeAspect="1"/>
+          </p:cNvPicPr>
+          <p:nvPr/>
+        </p:nvPicPr>
+        <p:blipFill>
+          <a:blip r:embed="rId2"/>
+          <a:stretch>
+            <a:fillRect/>
+          </a:stretch>
+        </p:blipFill>
+        <p:spPr>
+          <a:xfrm>
+            <a:off x="2300000" y="1400000"/>
+            <a:ext cx="7800000" cy="5200000"/>
+          </a:xfrm>
+          <a:prstGeom prst="rect">
+            <a:avLst/>
+          </a:prstGeom>
+        </p:spPr>
+      </p:pic>
+    </p:spTree>
+  </p:cSld>
+  <p:clrMapOvr>
+    <a:masterClrMapping/>
+  </p:clrMapOvr>
+</p:sld>
+</file>
+
+<file path=ppt/slides/slide13.xml><?xml version="1.0" encoding="utf-8"?>
+<p:sld xmlns:a="http://schemas.openxmlformats.org/drawingml/2006/main" xmlns:p="http://schemas.openxmlformats.org/presentationml/2006/main" xmlns:r="http://schemas.openxmlformats.org/officeDocument/2006/relationships">
+  <p:cSld>
+    <p:spTree>
+      <p:nvGrpSpPr>
+        <p:cNvPr id="1" name=""/>
+        <p:cNvGrpSpPr/>
+        <p:nvPr/>
+      </p:nvGrpSpPr>
+      <p:grpSpPr/>
+      <p:sp>
+        <p:nvSpPr>
+          <p:cNvPr id="2" name="Rectangle 1"/>
+          <p:cNvSpPr/>
+          <p:nvPr/>
+        </p:nvSpPr>
+        <p:spPr>
+          <a:xfrm>
+            <a:off x="0" y="0"/>
+            <a:ext cx="3400000" cy="6858000"/>
+          </a:xfrm>
+          <a:prstGeom prst="rect">
+            <a:avLst/>
+          </a:prstGeom>
+          <a:solidFill>
+            <a:srgbClr val="DDDDDD"/>
+          </a:solidFill>
+          <a:ln>
+            <a:noFill/>
+          </a:ln>
+        </p:spPr>
+        <p:style>
+          <a:lnRef idx="1">
+            <a:schemeClr val="accent1"/>
+          </a:lnRef>
+          <a:fillRef idx="3">
+            <a:schemeClr val="accent1"/>
+          </a:fillRef>
+          <a:effectRef idx="2">
+            <a:schemeClr val="accent1"/>
+          </a:effectRef>
+          <a:fontRef idx="minor">
+            <a:schemeClr val="lt1"/>
+          </a:fontRef>
+        </p:style>
+        <p:txBody>
+          <a:bodyPr rtlCol="0" anchor="ctr"/>
+          <a:lstStyle/>
+          <a:p>
+            <a:pPr algn="ctr"/>
+          </a:p>
+        </p:txBody>
+      </p:sp>
+      <p:sp>
+        <p:nvSpPr>
+          <p:cNvPr id="3" name="Rectangle 2"/>
+          <p:cNvSpPr/>
+          <p:nvPr/>
+        </p:nvSpPr>
+        <p:spPr>
+          <a:xfrm>
+            <a:off x="3400000" y="0"/>
+            <a:ext cx="8800000" cy="6858000"/>
+          </a:xfrm>
+          <a:prstGeom prst="rect">
+            <a:avLst/>
+          </a:prstGeom>
+          <a:solidFill>
+            <a:srgbClr val="F8F8F8"/>
+          </a:solidFill>
+          <a:ln>
+            <a:noFill/>
+          </a:ln>
+        </p:spPr>
+        <p:style>
+          <a:lnRef idx="1">
+            <a:schemeClr val="accent1"/>
+          </a:lnRef>
+          <a:fillRef idx="3">
+            <a:schemeClr val="accent1"/>
+          </a:fillRef>
+          <a:effectRef idx="2">
+            <a:schemeClr val="accent1"/>
+          </a:effectRef>
+          <a:fontRef idx="minor">
+            <a:schemeClr val="lt1"/>
+          </a:fontRef>
+        </p:style>
+        <p:txBody>
+          <a:bodyPr rtlCol="0" anchor="ctr"/>
+          <a:lstStyle/>
+          <a:p>
+            <a:pPr algn="ctr"/>
+          </a:p>
+        </p:txBody>
+      </p:sp>
+      <p:sp>
+        <p:nvSpPr>
+          <p:cNvPr id="4" name="TextBox 3"/>
+          <p:cNvSpPr txBox="1"/>
+          <p:nvPr/>
+        </p:nvSpPr>
+        <p:spPr>
+          <a:xfrm>
+            <a:off x="4000000" y="3000000"/>
+            <a:ext cx="7500000" cy="1000000"/>
+          </a:xfrm>
+          <a:prstGeom prst="rect">
+            <a:avLst/>
+          </a:prstGeom>
+          <a:noFill/>
+        </p:spPr>
+        <p:txBody>
+          <a:bodyPr wrap="square" anchor="ctr">
+            <a:spAutoFit/>
+          </a:bodyPr>
+          <a:lstStyle/>
+          <a:p>
+            <a:pPr algn="l"/>
+            <a:r>
+              <a:rPr sz="3000" b="1">
+                <a:solidFill>
+                  <a:srgbClr val="333333"/>
+                </a:solidFill>
+                <a:latin typeface="Open Sans"/>
+                <a:ea typeface="Open Sans"/>
+                <a:cs typeface="Open Sans"/>
+              </a:rPr>
+              <a:t>БЛАГОДАРИМ ЗА ВНИМАНИЕ</a:t>
+            </a:r>
+          </a:p>
+        </p:txBody>
+      </p:sp>
+      <p:sp>
+        <p:nvSpPr>
+          <p:cNvPr id="5" name="Rectangle 4"/>
+          <p:cNvSpPr/>
+          <p:nvPr/>
+        </p:nvSpPr>
+        <p:spPr>
+          <a:xfrm>
+            <a:off x="4000000" y="4100000"/>
+            <a:ext cx="4500000" cy="30000"/>
+          </a:xfrm>
+          <a:prstGeom prst="rect">
+            <a:avLst/>
+          </a:prstGeom>
+          <a:solidFill>
+            <a:srgbClr val="333333"/>
+          </a:solidFill>
+          <a:ln>
+            <a:noFill/>
+          </a:ln>
+        </p:spPr>
+        <p:style>
+          <a:lnRef idx="1">
+            <a:schemeClr val="accent1"/>
+          </a:lnRef>
+          <a:fillRef idx="3">
+            <a:schemeClr val="accent1"/>
+          </a:fillRef>
+          <a:effectRef idx="2">
+            <a:schemeClr val="accent1"/>
+          </a:effectRef>
+          <a:fontRef idx="minor">
+            <a:schemeClr val="lt1"/>
+          </a:fontRef>
+        </p:style>
+        <p:txBody>
+          <a:bodyPr rtlCol="0" anchor="ctr"/>
+          <a:lstStyle/>
+          <a:p>
+            <a:pPr algn="ctr"/>
+          </a:p>
+        </p:txBody>
+      </p:sp>
+    </p:spTree>
+  </p:cSld>
+  <p:clrMapOvr>
+    <a:masterClrMapping/>
+  </p:clrMapOvr>
+</p:sld>
+</file>
+
 <file path=ppt/slides/slide2.xml><?xml version="1.0" encoding="utf-8"?>
 <p:sld xmlns:a="http://schemas.openxmlformats.org/drawingml/2006/main" xmlns:p="http://schemas.openxmlformats.org/presentationml/2006/main" xmlns:r="http://schemas.openxmlformats.org/officeDocument/2006/relationships">
   <p:cSld>
@@ -3758,7 +5580,7 @@
                 <a:ea typeface="Open Sans"/>
                 <a:cs typeface="Open Sans"/>
               </a:rPr>
-              <a:t>Три обязательных условия</a:t>
+              <a:t>Граница первой помощи</a:t>
             </a:r>
           </a:p>
         </p:txBody>
@@ -3920,7 +5742,7 @@
                 <a:ea typeface="Open Sans"/>
                 <a:cs typeface="Open Sans"/>
               </a:rPr>
-              <a:t>Что может сделать помощник</a:t>
+              <a:t>Три обязательных условия</a:t>
             </a:r>
           </a:p>
         </p:txBody>
@@ -4082,7 +5904,7 @@
                 <a:ea typeface="Open Sans"/>
                 <a:cs typeface="Open Sans"/>
               </a:rPr>
-              <a:t>Что нельзя делать</a:t>
+              <a:t>Допустимые действия</a:t>
             </a:r>
           </a:p>
         </p:txBody>
@@ -4244,7 +6066,169 @@
                 <a:ea typeface="Open Sans"/>
                 <a:cs typeface="Open Sans"/>
               </a:rPr>
-              <a:t>Контроль состояния</a:t>
+              <a:t>Запрещенные действия</a:t>
+            </a:r>
+          </a:p>
+        </p:txBody>
+      </p:sp>
+      <p:sp>
+        <p:nvSpPr>
+          <p:cNvPr id="24" name="Oval 23"/>
+          <p:cNvSpPr/>
+          <p:nvPr/>
+        </p:nvSpPr>
+        <p:spPr>
+          <a:xfrm>
+            <a:off x="700000" y="4950000"/>
+            <a:ext cx="520000" cy="520000"/>
+          </a:xfrm>
+          <a:prstGeom prst="ellipse">
+            <a:avLst/>
+          </a:prstGeom>
+          <a:solidFill>
+            <a:srgbClr val="555555"/>
+          </a:solidFill>
+          <a:ln>
+            <a:noFill/>
+          </a:ln>
+        </p:spPr>
+        <p:style>
+          <a:lnRef idx="1">
+            <a:schemeClr val="accent1"/>
+          </a:lnRef>
+          <a:fillRef idx="3">
+            <a:schemeClr val="accent1"/>
+          </a:fillRef>
+          <a:effectRef idx="2">
+            <a:schemeClr val="accent1"/>
+          </a:effectRef>
+          <a:fontRef idx="minor">
+            <a:schemeClr val="lt1"/>
+          </a:fontRef>
+        </p:style>
+        <p:txBody>
+          <a:bodyPr rtlCol="0" anchor="ctr"/>
+          <a:lstStyle/>
+          <a:p>
+            <a:pPr algn="ctr"/>
+          </a:p>
+        </p:txBody>
+      </p:sp>
+      <p:sp>
+        <p:nvSpPr>
+          <p:cNvPr id="25" name="TextBox 24"/>
+          <p:cNvSpPr txBox="1"/>
+          <p:nvPr/>
+        </p:nvSpPr>
+        <p:spPr>
+          <a:xfrm>
+            <a:off x="700000" y="4950000"/>
+            <a:ext cx="520000" cy="520000"/>
+          </a:xfrm>
+          <a:prstGeom prst="rect">
+            <a:avLst/>
+          </a:prstGeom>
+          <a:noFill/>
+        </p:spPr>
+        <p:txBody>
+          <a:bodyPr wrap="square" anchor="ctr">
+            <a:spAutoFit/>
+          </a:bodyPr>
+          <a:lstStyle/>
+          <a:p>
+            <a:pPr algn="ctr"/>
+            <a:r>
+              <a:rPr sz="1500" b="1">
+                <a:solidFill>
+                  <a:srgbClr val="FFFFFF"/>
+                </a:solidFill>
+                <a:latin typeface="Open Sans"/>
+                <a:ea typeface="Open Sans"/>
+                <a:cs typeface="Open Sans"/>
+              </a:rPr>
+              <a:t>5</a:t>
+            </a:r>
+          </a:p>
+        </p:txBody>
+      </p:sp>
+      <p:sp>
+        <p:nvSpPr>
+          <p:cNvPr id="26" name="Rectangle 25"/>
+          <p:cNvSpPr/>
+          <p:nvPr/>
+        </p:nvSpPr>
+        <p:spPr>
+          <a:xfrm>
+            <a:off x="1400000" y="4950000"/>
+            <a:ext cx="10000000" cy="520000"/>
+          </a:xfrm>
+          <a:prstGeom prst="rect">
+            <a:avLst/>
+          </a:prstGeom>
+          <a:solidFill>
+            <a:srgbClr val="FFFFFF"/>
+          </a:solidFill>
+          <a:ln w="12700">
+            <a:solidFill>
+              <a:srgbClr val="999999"/>
+            </a:solidFill>
+          </a:ln>
+        </p:spPr>
+        <p:style>
+          <a:lnRef idx="1">
+            <a:schemeClr val="accent1"/>
+          </a:lnRef>
+          <a:fillRef idx="3">
+            <a:schemeClr val="accent1"/>
+          </a:fillRef>
+          <a:effectRef idx="2">
+            <a:schemeClr val="accent1"/>
+          </a:effectRef>
+          <a:fontRef idx="minor">
+            <a:schemeClr val="lt1"/>
+          </a:fontRef>
+        </p:style>
+        <p:txBody>
+          <a:bodyPr rtlCol="0" anchor="ctr"/>
+          <a:lstStyle/>
+          <a:p>
+            <a:pPr algn="ctr"/>
+          </a:p>
+        </p:txBody>
+      </p:sp>
+      <p:sp>
+        <p:nvSpPr>
+          <p:cNvPr id="27" name="TextBox 26"/>
+          <p:cNvSpPr txBox="1"/>
+          <p:nvPr/>
+        </p:nvSpPr>
+        <p:spPr>
+          <a:xfrm>
+            <a:off x="1600000" y="4950000"/>
+            <a:ext cx="9600000" cy="520000"/>
+          </a:xfrm>
+          <a:prstGeom prst="rect">
+            <a:avLst/>
+          </a:prstGeom>
+          <a:noFill/>
+        </p:spPr>
+        <p:txBody>
+          <a:bodyPr wrap="square" anchor="ctr">
+            <a:spAutoFit/>
+          </a:bodyPr>
+          <a:lstStyle/>
+          <a:p>
+            <a:pPr algn="l"/>
+            <a:r>
+              <a:rPr sz="1500" b="0">
+                <a:solidFill>
+                  <a:srgbClr val="333333"/>
+                </a:solidFill>
+                <a:latin typeface="Open Sans"/>
+                <a:ea typeface="Open Sans"/>
+                <a:cs typeface="Open Sans"/>
+              </a:rPr>
+              <a:t>Наблюдение</a:t>
             </a:r>
           </a:p>
         </p:txBody>
@@ -4342,7 +6326,7 @@
                 <a:ea typeface="Open Sans"/>
                 <a:cs typeface="Open Sans"/>
               </a:rPr>
-              <a:t>ГРАНИЦА ПЕРВОЙ ПОМОЩИ</a:t>
+              <a:t>ПОМОЩЬ — НЕ НАЗНАЧЕНИЕ ЛЕЧЕНИЯ</a:t>
             </a:r>
           </a:p>
         </p:txBody>
@@ -4515,8 +6499,8 @@
         </p:nvSpPr>
         <p:spPr>
           <a:xfrm>
-            <a:off x="700000" y="1600000"/>
-            <a:ext cx="11000000" cy="4200000"/>
+            <a:off x="700000" y="1500000"/>
+            <a:ext cx="11000000" cy="4900000"/>
           </a:xfrm>
           <a:prstGeom prst="rect">
             <a:avLst/>
@@ -4531,7 +6515,7 @@
           <a:p>
             <a:pPr algn="l"/>
             <a:r>
-              <a:rPr sz="1600" b="0">
+              <a:rPr sz="1500" b="0">
                 <a:solidFill>
                   <a:srgbClr val="333333"/>
                 </a:solidFill>
@@ -4539,7 +6523,7 @@
                 <a:ea typeface="Open Sans"/>
                 <a:cs typeface="Open Sans"/>
               </a:rPr>
-              <a:t>Оказывающий первую помощь не назначает лекарства. Он может лишь помочь пострадавшему принять его собственный препарат при выполнении всех обязательных условий.</a:t>
+              <a:t>Оказывающий первую помощь не подбирает лекарство, не определяет показания и дозу. Он может лишь технически помочь пострадавшему использовать его собственный препарат, который был назначен врачом и принимается по предусмотренной медицинской причине.</a:t>
             </a:r>
           </a:p>
         </p:txBody>
@@ -4810,8 +6794,8 @@
         </p:nvSpPr>
         <p:spPr>
           <a:xfrm>
-            <a:off x="700000" y="1450000"/>
-            <a:ext cx="3500000" cy="4800000"/>
+            <a:off x="700000" y="1400000"/>
+            <a:ext cx="3533333" cy="5000000"/>
           </a:xfrm>
           <a:prstGeom prst="rect">
             <a:avLst/>
@@ -4855,8 +6839,8 @@
         </p:nvSpPr>
         <p:spPr>
           <a:xfrm>
-            <a:off x="850000" y="1650000"/>
-            <a:ext cx="500000" cy="500000"/>
+            <a:off x="820000" y="1550000"/>
+            <a:ext cx="450000" cy="450000"/>
           </a:xfrm>
           <a:prstGeom prst="ellipse">
             <a:avLst/>
@@ -4898,8 +6882,8 @@
         </p:nvSpPr>
         <p:spPr>
           <a:xfrm>
-            <a:off x="850000" y="1650000"/>
-            <a:ext cx="500000" cy="500000"/>
+            <a:off x="820000" y="1550000"/>
+            <a:ext cx="450000" cy="450000"/>
           </a:xfrm>
           <a:prstGeom prst="rect">
             <a:avLst/>
@@ -4914,7 +6898,7 @@
           <a:p>
             <a:pPr algn="ctr"/>
             <a:r>
-              <a:rPr sz="1400" b="1">
+              <a:rPr sz="1300" b="1">
                 <a:solidFill>
                   <a:srgbClr val="FFFFFF"/>
                 </a:solidFill>
@@ -4935,8 +6919,8 @@
         </p:nvSpPr>
         <p:spPr>
           <a:xfrm>
-            <a:off x="1450000" y="1700000"/>
-            <a:ext cx="2600000" cy="450000"/>
+            <a:off x="1350000" y="1580000"/>
+            <a:ext cx="2733333" cy="400000"/>
           </a:xfrm>
           <a:prstGeom prst="rect">
             <a:avLst/>
@@ -4951,7 +6935,7 @@
           <a:p>
             <a:pPr algn="l"/>
             <a:r>
-              <a:rPr sz="1300" b="1">
+              <a:rPr sz="1200" b="1">
                 <a:solidFill>
                   <a:srgbClr val="333333"/>
                 </a:solidFill>
@@ -4959,7 +6943,7 @@
                 <a:ea typeface="Open Sans"/>
                 <a:cs typeface="Open Sans"/>
               </a:rPr>
-              <a:t>Принадлежит пострадавшему</a:t>
+              <a:t>Его препарат</a:t>
             </a:r>
           </a:p>
         </p:txBody>
@@ -4972,8 +6956,8 @@
         </p:nvSpPr>
         <p:spPr>
           <a:xfrm>
-            <a:off x="850000" y="2300000"/>
-            <a:ext cx="3200000" cy="3800000"/>
+            <a:off x="820000" y="2100000"/>
+            <a:ext cx="3293333" cy="4150000"/>
           </a:xfrm>
           <a:prstGeom prst="rect">
             <a:avLst/>
@@ -4996,7 +6980,7 @@
                 <a:ea typeface="Open Sans"/>
                 <a:cs typeface="Open Sans"/>
               </a:rPr>
-              <a:t>Препарат взят из его вещей, сумки или одежды.</a:t>
+              <a:t>Лекарство принадлежит пострадавшему и находится в его вещах, аптечке или одежде.</a:t>
             </a:r>
           </a:p>
         </p:txBody>
@@ -5009,8 +6993,8 @@
         </p:nvSpPr>
         <p:spPr>
           <a:xfrm>
-            <a:off x="4450000" y="1450000"/>
-            <a:ext cx="3500000" cy="4800000"/>
+            <a:off x="4433333" y="1400000"/>
+            <a:ext cx="3533333" cy="5000000"/>
           </a:xfrm>
           <a:prstGeom prst="rect">
             <a:avLst/>
@@ -5054,8 +7038,8 @@
         </p:nvSpPr>
         <p:spPr>
           <a:xfrm>
-            <a:off x="4600000" y="1650000"/>
-            <a:ext cx="500000" cy="500000"/>
+            <a:off x="4553333" y="1550000"/>
+            <a:ext cx="450000" cy="450000"/>
           </a:xfrm>
           <a:prstGeom prst="ellipse">
             <a:avLst/>
@@ -5097,8 +7081,8 @@
         </p:nvSpPr>
         <p:spPr>
           <a:xfrm>
-            <a:off x="4600000" y="1650000"/>
-            <a:ext cx="500000" cy="500000"/>
+            <a:off x="4553333" y="1550000"/>
+            <a:ext cx="450000" cy="450000"/>
           </a:xfrm>
           <a:prstGeom prst="rect">
             <a:avLst/>
@@ -5113,7 +7097,7 @@
           <a:p>
             <a:pPr algn="ctr"/>
             <a:r>
-              <a:rPr sz="1400" b="1">
+              <a:rPr sz="1300" b="1">
                 <a:solidFill>
                   <a:srgbClr val="FFFFFF"/>
                 </a:solidFill>
@@ -5134,8 +7118,8 @@
         </p:nvSpPr>
         <p:spPr>
           <a:xfrm>
-            <a:off x="5200000" y="1700000"/>
-            <a:ext cx="2600000" cy="450000"/>
+            <a:off x="5083333" y="1580000"/>
+            <a:ext cx="2733333" cy="400000"/>
           </a:xfrm>
           <a:prstGeom prst="rect">
             <a:avLst/>
@@ -5150,7 +7134,7 @@
           <a:p>
             <a:pPr algn="l"/>
             <a:r>
-              <a:rPr sz="1300" b="1">
+              <a:rPr sz="1200" b="1">
                 <a:solidFill>
                   <a:srgbClr val="333333"/>
                 </a:solidFill>
@@ -5158,7 +7142,7 @@
                 <a:ea typeface="Open Sans"/>
                 <a:cs typeface="Open Sans"/>
               </a:rPr>
-              <a:t>Назначен врачом</a:t>
+              <a:t>Назначение врача</a:t>
             </a:r>
           </a:p>
         </p:txBody>
@@ -5171,8 +7155,8 @@
         </p:nvSpPr>
         <p:spPr>
           <a:xfrm>
-            <a:off x="4600000" y="2300000"/>
-            <a:ext cx="3200000" cy="3800000"/>
+            <a:off x="4553333" y="2100000"/>
+            <a:ext cx="3293333" cy="4150000"/>
           </a:xfrm>
           <a:prstGeom prst="rect">
             <a:avLst/>
@@ -5195,7 +7179,7 @@
                 <a:ea typeface="Open Sans"/>
                 <a:cs typeface="Open Sans"/>
               </a:rPr>
-              <a:t>Пострадавший подтверждает медицинское назначение.</a:t>
+              <a:t>Пострадавший подтверждает, что препарат назначен ему медицинским работником.</a:t>
             </a:r>
           </a:p>
         </p:txBody>
@@ -5208,8 +7192,8 @@
         </p:nvSpPr>
         <p:spPr>
           <a:xfrm>
-            <a:off x="8200000" y="1450000"/>
-            <a:ext cx="3500000" cy="4800000"/>
+            <a:off x="8166666" y="1400000"/>
+            <a:ext cx="3533333" cy="5000000"/>
           </a:xfrm>
           <a:prstGeom prst="rect">
             <a:avLst/>
@@ -5253,8 +7237,8 @@
         </p:nvSpPr>
         <p:spPr>
           <a:xfrm>
-            <a:off x="8350000" y="1650000"/>
-            <a:ext cx="500000" cy="500000"/>
+            <a:off x="8286666" y="1550000"/>
+            <a:ext cx="450000" cy="450000"/>
           </a:xfrm>
           <a:prstGeom prst="ellipse">
             <a:avLst/>
@@ -5296,8 +7280,8 @@
         </p:nvSpPr>
         <p:spPr>
           <a:xfrm>
-            <a:off x="8350000" y="1650000"/>
-            <a:ext cx="500000" cy="500000"/>
+            <a:off x="8286666" y="1550000"/>
+            <a:ext cx="450000" cy="450000"/>
           </a:xfrm>
           <a:prstGeom prst="rect">
             <a:avLst/>
@@ -5312,7 +7296,7 @@
           <a:p>
             <a:pPr algn="ctr"/>
             <a:r>
-              <a:rPr sz="1400" b="1">
+              <a:rPr sz="1300" b="1">
                 <a:solidFill>
                   <a:srgbClr val="FFFFFF"/>
                 </a:solidFill>
@@ -5333,8 +7317,8 @@
         </p:nvSpPr>
         <p:spPr>
           <a:xfrm>
-            <a:off x="8950000" y="1700000"/>
-            <a:ext cx="2600000" cy="450000"/>
+            <a:off x="8816666" y="1580000"/>
+            <a:ext cx="2733333" cy="400000"/>
           </a:xfrm>
           <a:prstGeom prst="rect">
             <a:avLst/>
@@ -5349,7 +7333,7 @@
           <a:p>
             <a:pPr algn="l"/>
             <a:r>
-              <a:rPr sz="1300" b="1">
+              <a:rPr sz="1200" b="1">
                 <a:solidFill>
                   <a:srgbClr val="333333"/>
                 </a:solidFill>
@@ -5357,7 +7341,7 @@
                 <a:ea typeface="Open Sans"/>
                 <a:cs typeface="Open Sans"/>
               </a:rPr>
-              <a:t>Нужен для лечения</a:t>
+              <a:t>Медицинская цель</a:t>
             </a:r>
           </a:p>
         </p:txBody>
@@ -5370,8 +7354,8 @@
         </p:nvSpPr>
         <p:spPr>
           <a:xfrm>
-            <a:off x="8350000" y="2300000"/>
-            <a:ext cx="3200000" cy="3800000"/>
+            <a:off x="8286666" y="2100000"/>
+            <a:ext cx="3293333" cy="4150000"/>
           </a:xfrm>
           <a:prstGeom prst="rect">
             <a:avLst/>
@@ -5394,7 +7378,7 @@
                 <a:ea typeface="Open Sans"/>
                 <a:cs typeface="Open Sans"/>
               </a:rPr>
-              <a:t>Лекарство принимается в предусмотренных медицинских целях.</a:t>
+              <a:t>Препарат принимается именно для того состояния и способом, для которых был назначен.</a:t>
             </a:r>
           </a:p>
         </p:txBody>
@@ -5492,7 +7476,7 @@
                 <a:ea typeface="Open Sans"/>
                 <a:cs typeface="Open Sans"/>
               </a:rPr>
-              <a:t>ДОПУСТИМАЯ ПОМОЩЬ</a:t>
+              <a:t>ЧТО НУЖНО УТОЧНИТЬ</a:t>
             </a:r>
           </a:p>
         </p:txBody>
@@ -5666,81 +7650,7 @@
         <p:spPr>
           <a:xfrm>
             <a:off x="700000" y="1450000"/>
-            <a:ext cx="5400000" cy="400000"/>
-          </a:xfrm>
-          <a:prstGeom prst="rect">
-            <a:avLst/>
-          </a:prstGeom>
-          <a:noFill/>
-        </p:spPr>
-        <p:txBody>
-          <a:bodyPr wrap="square" anchor="t">
-            <a:spAutoFit/>
-          </a:bodyPr>
-          <a:lstStyle/>
-          <a:p>
-            <a:pPr algn="l"/>
-            <a:r>
-              <a:rPr sz="1400" b="1">
-                <a:solidFill>
-                  <a:srgbClr val="333333"/>
-                </a:solidFill>
-                <a:latin typeface="Open Sans"/>
-                <a:ea typeface="Open Sans"/>
-                <a:cs typeface="Open Sans"/>
-              </a:rPr>
-              <a:t>Можно</a:t>
-            </a:r>
-          </a:p>
-        </p:txBody>
-      </p:sp>
-      <p:sp>
-        <p:nvSpPr>
-          <p:cNvPr id="9" name="TextBox 8"/>
-          <p:cNvSpPr txBox="1"/>
-          <p:nvPr/>
-        </p:nvSpPr>
-        <p:spPr>
-          <a:xfrm>
-            <a:off x="6600000" y="1450000"/>
-            <a:ext cx="5400000" cy="400000"/>
-          </a:xfrm>
-          <a:prstGeom prst="rect">
-            <a:avLst/>
-          </a:prstGeom>
-          <a:noFill/>
-        </p:spPr>
-        <p:txBody>
-          <a:bodyPr wrap="square" anchor="t">
-            <a:spAutoFit/>
-          </a:bodyPr>
-          <a:lstStyle/>
-          <a:p>
-            <a:pPr algn="l"/>
-            <a:r>
-              <a:rPr sz="1400" b="1">
-                <a:solidFill>
-                  <a:srgbClr val="333333"/>
-                </a:solidFill>
-                <a:latin typeface="Open Sans"/>
-                <a:ea typeface="Open Sans"/>
-                <a:cs typeface="Open Sans"/>
-              </a:rPr>
-              <a:t>Нельзя</a:t>
-            </a:r>
-          </a:p>
-        </p:txBody>
-      </p:sp>
-      <p:sp>
-        <p:nvSpPr>
-          <p:cNvPr id="10" name="TextBox 9"/>
-          <p:cNvSpPr txBox="1"/>
-          <p:nvPr/>
-        </p:nvSpPr>
-        <p:spPr>
-          <a:xfrm>
-            <a:off x="700000" y="1950000"/>
-            <a:ext cx="5400000" cy="4000000"/>
+            <a:ext cx="11000000" cy="4000000"/>
           </a:xfrm>
           <a:prstGeom prst="rect">
             <a:avLst/>
@@ -5759,7 +7669,7 @@
               </a:spcAft>
             </a:pPr>
             <a:r>
-              <a:rPr sz="1300" b="0">
+              <a:rPr sz="1400" b="0">
                 <a:solidFill>
                   <a:srgbClr val="333333"/>
                 </a:solidFill>
@@ -5767,7 +7677,7 @@
                 <a:ea typeface="Open Sans"/>
                 <a:cs typeface="Open Sans"/>
               </a:rPr>
-              <a:t>•  найти препарат в сумке или одежде</a:t>
+              <a:t>•  Как называется препарат и где он находится.</a:t>
             </a:r>
           </a:p>
           <a:p>
@@ -5777,7 +7687,7 @@
               </a:spcAft>
             </a:pPr>
             <a:r>
-              <a:rPr sz="1300" b="0">
+              <a:rPr sz="1400" b="0">
                 <a:solidFill>
                   <a:srgbClr val="333333"/>
                 </a:solidFill>
@@ -5785,7 +7695,7 @@
                 <a:ea typeface="Open Sans"/>
                 <a:cs typeface="Open Sans"/>
               </a:rPr>
-              <a:t>•  открыть упаковку</a:t>
+              <a:t>•  Кому он принадлежит и был ли назначен именно этому человеку.</a:t>
             </a:r>
           </a:p>
           <a:p>
@@ -5795,7 +7705,7 @@
               </a:spcAft>
             </a:pPr>
             <a:r>
-              <a:rPr sz="1300" b="0">
+              <a:rPr sz="1400" b="0">
                 <a:solidFill>
                   <a:srgbClr val="333333"/>
                 </a:solidFill>
@@ -5803,7 +7713,7 @@
                 <a:ea typeface="Open Sans"/>
                 <a:cs typeface="Open Sans"/>
               </a:rPr>
-              <a:t>•  подать лекарство</a:t>
+              <a:t>•  Для какого состояния и в какой форме его обычно применяют.</a:t>
             </a:r>
           </a:p>
           <a:p>
@@ -5813,7 +7723,7 @@
               </a:spcAft>
             </a:pPr>
             <a:r>
-              <a:rPr sz="1300" b="0">
+              <a:rPr sz="1400" b="0">
                 <a:solidFill>
                   <a:srgbClr val="333333"/>
                 </a:solidFill>
@@ -5821,7 +7731,7 @@
                 <a:ea typeface="Open Sans"/>
                 <a:cs typeface="Open Sans"/>
               </a:rPr>
-              <a:t>•  дать воду для запивания</a:t>
+              <a:t>•  Когда препарат принимался в последний раз.</a:t>
             </a:r>
           </a:p>
           <a:p>
@@ -5831,7 +7741,7 @@
               </a:spcAft>
             </a:pPr>
             <a:r>
-              <a:rPr sz="1300" b="0">
+              <a:rPr sz="1400" b="0">
                 <a:solidFill>
                   <a:srgbClr val="333333"/>
                 </a:solidFill>
@@ -5839,32 +7749,9 @@
                 <a:ea typeface="Open Sans"/>
                 <a:cs typeface="Open Sans"/>
               </a:rPr>
-              <a:t>•  помочь занять удобное положение</a:t>
-            </a:r>
-          </a:p>
-        </p:txBody>
-      </p:sp>
-      <p:sp>
-        <p:nvSpPr>
-          <p:cNvPr id="11" name="TextBox 10"/>
-          <p:cNvSpPr txBox="1"/>
-          <p:nvPr/>
-        </p:nvSpPr>
-        <p:spPr>
-          <a:xfrm>
-            <a:off x="6600000" y="1950000"/>
-            <a:ext cx="5400000" cy="4000000"/>
-          </a:xfrm>
-          <a:prstGeom prst="rect">
-            <a:avLst/>
-          </a:prstGeom>
-          <a:noFill/>
-        </p:spPr>
-        <p:txBody>
-          <a:bodyPr wrap="square">
-            <a:spAutoFit/>
-          </a:bodyPr>
-          <a:lstStyle/>
+              <a:t>•  Какую дозу пострадавшему назначил врач.</a:t>
+            </a:r>
+          </a:p>
           <a:p>
             <a:pPr algn="l">
               <a:spcAft>
@@ -5872,7 +7759,7 @@
               </a:spcAft>
             </a:pPr>
             <a:r>
-              <a:rPr sz="1300" b="0">
+              <a:rPr sz="1400" b="0">
                 <a:solidFill>
                   <a:srgbClr val="333333"/>
                 </a:solidFill>
@@ -5880,17 +7767,79 @@
                 <a:ea typeface="Open Sans"/>
                 <a:cs typeface="Open Sans"/>
               </a:rPr>
-              <a:t>•  предлагать свое лекарство</a:t>
-            </a:r>
-          </a:p>
-          <a:p>
-            <a:pPr algn="l">
-              <a:spcAft>
-                <a:spcPts val="800"/>
-              </a:spcAft>
-            </a:pPr>
-            <a:r>
-              <a:rPr sz="1300" b="0">
+              <a:t>•  Способен ли человек ясно отвечать, самостоятельно глотать и контролировать прием.</a:t>
+            </a:r>
+          </a:p>
+        </p:txBody>
+      </p:sp>
+      <p:sp>
+        <p:nvSpPr>
+          <p:cNvPr id="9" name="Rounded Rectangle 8"/>
+          <p:cNvSpPr/>
+          <p:nvPr/>
+        </p:nvSpPr>
+        <p:spPr>
+          <a:xfrm>
+            <a:off x="700000" y="5600000"/>
+            <a:ext cx="11000000" cy="1000000"/>
+          </a:xfrm>
+          <a:prstGeom prst="roundRect">
+            <a:avLst/>
+          </a:prstGeom>
+          <a:solidFill>
+            <a:srgbClr val="F5F0E1"/>
+          </a:solidFill>
+          <a:ln>
+            <a:noFill/>
+          </a:ln>
+        </p:spPr>
+        <p:style>
+          <a:lnRef idx="1">
+            <a:schemeClr val="accent1"/>
+          </a:lnRef>
+          <a:fillRef idx="3">
+            <a:schemeClr val="accent1"/>
+          </a:fillRef>
+          <a:effectRef idx="2">
+            <a:schemeClr val="accent1"/>
+          </a:effectRef>
+          <a:fontRef idx="minor">
+            <a:schemeClr val="lt1"/>
+          </a:fontRef>
+        </p:style>
+        <p:txBody>
+          <a:bodyPr rtlCol="0" anchor="ctr"/>
+          <a:lstStyle/>
+          <a:p>
+            <a:pPr algn="ctr"/>
+          </a:p>
+        </p:txBody>
+      </p:sp>
+      <p:sp>
+        <p:nvSpPr>
+          <p:cNvPr id="10" name="TextBox 9"/>
+          <p:cNvSpPr txBox="1"/>
+          <p:nvPr/>
+        </p:nvSpPr>
+        <p:spPr>
+          <a:xfrm>
+            <a:off x="950000" y="5800000"/>
+            <a:ext cx="10500000" cy="600000"/>
+          </a:xfrm>
+          <a:prstGeom prst="rect">
+            <a:avLst/>
+          </a:prstGeom>
+          <a:noFill/>
+        </p:spPr>
+        <p:txBody>
+          <a:bodyPr wrap="square" anchor="ctr">
+            <a:spAutoFit/>
+          </a:bodyPr>
+          <a:lstStyle/>
+          <a:p>
+            <a:pPr algn="l"/>
+            <a:r>
+              <a:rPr sz="1200" b="0">
                 <a:solidFill>
                   <a:srgbClr val="333333"/>
                 </a:solidFill>
@@ -5898,61 +7847,7 @@
                 <a:ea typeface="Open Sans"/>
                 <a:cs typeface="Open Sans"/>
               </a:rPr>
-              <a:t>•  самостоятельно выбирать препарат</a:t>
-            </a:r>
-          </a:p>
-          <a:p>
-            <a:pPr algn="l">
-              <a:spcAft>
-                <a:spcPts val="800"/>
-              </a:spcAft>
-            </a:pPr>
-            <a:r>
-              <a:rPr sz="1300" b="0">
-                <a:solidFill>
-                  <a:srgbClr val="333333"/>
-                </a:solidFill>
-                <a:latin typeface="Open Sans"/>
-                <a:ea typeface="Open Sans"/>
-                <a:cs typeface="Open Sans"/>
-              </a:rPr>
-              <a:t>•  изменять назначенную дозу</a:t>
-            </a:r>
-          </a:p>
-          <a:p>
-            <a:pPr algn="l">
-              <a:spcAft>
-                <a:spcPts val="800"/>
-              </a:spcAft>
-            </a:pPr>
-            <a:r>
-              <a:rPr sz="1300" b="0">
-                <a:solidFill>
-                  <a:srgbClr val="333333"/>
-                </a:solidFill>
-                <a:latin typeface="Open Sans"/>
-                <a:ea typeface="Open Sans"/>
-                <a:cs typeface="Open Sans"/>
-              </a:rPr>
-              <a:t>•  заставлять человека принять лекарство</a:t>
-            </a:r>
-          </a:p>
-          <a:p>
-            <a:pPr algn="l">
-              <a:spcAft>
-                <a:spcPts val="800"/>
-              </a:spcAft>
-            </a:pPr>
-            <a:r>
-              <a:rPr sz="1300" b="0">
-                <a:solidFill>
-                  <a:srgbClr val="333333"/>
-                </a:solidFill>
-                <a:latin typeface="Open Sans"/>
-                <a:ea typeface="Open Sans"/>
-                <a:cs typeface="Open Sans"/>
-              </a:rPr>
-              <a:t>•  давать что-либо через рот без сознания</a:t>
+              <a:t>Помощник не исправляет и не дополняет сведения пострадавшего собственными догадками.</a:t>
             </a:r>
           </a:p>
         </p:txBody>
@@ -6050,7 +7945,7 @@
                 <a:ea typeface="Open Sans"/>
                 <a:cs typeface="Open Sans"/>
               </a:rPr>
-              <a:t>ПОСЛЕ ПРИЕМА</a:t>
+              <a:t>КАК МОЖНО ПОМОЧЬ</a:t>
             </a:r>
           </a:p>
         </p:txBody>
@@ -6217,14 +8112,57 @@
       </p:sp>
       <p:sp>
         <p:nvSpPr>
-          <p:cNvPr id="8" name="TextBox 7"/>
+          <p:cNvPr id="8" name="Oval 7"/>
+          <p:cNvSpPr/>
+          <p:nvPr/>
+        </p:nvSpPr>
+        <p:spPr>
+          <a:xfrm>
+            <a:off x="700000" y="1400000"/>
+            <a:ext cx="500000" cy="500000"/>
+          </a:xfrm>
+          <a:prstGeom prst="ellipse">
+            <a:avLst/>
+          </a:prstGeom>
+          <a:solidFill>
+            <a:srgbClr val="CC0000"/>
+          </a:solidFill>
+          <a:ln>
+            <a:noFill/>
+          </a:ln>
+        </p:spPr>
+        <p:style>
+          <a:lnRef idx="1">
+            <a:schemeClr val="accent1"/>
+          </a:lnRef>
+          <a:fillRef idx="3">
+            <a:schemeClr val="accent1"/>
+          </a:fillRef>
+          <a:effectRef idx="2">
+            <a:schemeClr val="accent1"/>
+          </a:effectRef>
+          <a:fontRef idx="minor">
+            <a:schemeClr val="lt1"/>
+          </a:fontRef>
+        </p:style>
+        <p:txBody>
+          <a:bodyPr rtlCol="0" anchor="ctr"/>
+          <a:lstStyle/>
+          <a:p>
+            <a:pPr algn="ctr"/>
+          </a:p>
+        </p:txBody>
+      </p:sp>
+      <p:sp>
+        <p:nvSpPr>
+          <p:cNvPr id="9" name="TextBox 8"/>
           <p:cNvSpPr txBox="1"/>
           <p:nvPr/>
         </p:nvSpPr>
         <p:spPr>
           <a:xfrm>
-            <a:off x="700000" y="1500000"/>
-            <a:ext cx="11000000" cy="4200000"/>
+            <a:off x="700000" y="1400000"/>
+            <a:ext cx="500000" cy="500000"/>
           </a:xfrm>
           <a:prstGeom prst="rect">
             <a:avLst/>
@@ -6232,18 +8170,96 @@
           <a:noFill/>
         </p:spPr>
         <p:txBody>
-          <a:bodyPr wrap="square">
+          <a:bodyPr wrap="square" anchor="ctr">
             <a:spAutoFit/>
           </a:bodyPr>
           <a:lstStyle/>
           <a:p>
-            <a:pPr algn="l">
-              <a:spcAft>
-                <a:spcPts val="800"/>
-              </a:spcAft>
-            </a:pPr>
-            <a:r>
-              <a:rPr sz="1400" b="0">
+            <a:pPr algn="ctr"/>
+            <a:r>
+              <a:rPr sz="1300" b="1">
+                <a:solidFill>
+                  <a:srgbClr val="FFFFFF"/>
+                </a:solidFill>
+                <a:latin typeface="Open Sans"/>
+                <a:ea typeface="Open Sans"/>
+                <a:cs typeface="Open Sans"/>
+              </a:rPr>
+              <a:t>1</a:t>
+            </a:r>
+          </a:p>
+        </p:txBody>
+      </p:sp>
+      <p:sp>
+        <p:nvSpPr>
+          <p:cNvPr id="10" name="Rectangle 9"/>
+          <p:cNvSpPr/>
+          <p:nvPr/>
+        </p:nvSpPr>
+        <p:spPr>
+          <a:xfrm>
+            <a:off x="1400000" y="1400000"/>
+            <a:ext cx="10550000" cy="620000"/>
+          </a:xfrm>
+          <a:prstGeom prst="rect">
+            <a:avLst/>
+          </a:prstGeom>
+          <a:solidFill>
+            <a:srgbClr val="FFFFFF"/>
+          </a:solidFill>
+          <a:ln w="12700">
+            <a:solidFill>
+              <a:srgbClr val="999999"/>
+            </a:solidFill>
+          </a:ln>
+        </p:spPr>
+        <p:style>
+          <a:lnRef idx="1">
+            <a:schemeClr val="accent1"/>
+          </a:lnRef>
+          <a:fillRef idx="3">
+            <a:schemeClr val="accent1"/>
+          </a:fillRef>
+          <a:effectRef idx="2">
+            <a:schemeClr val="accent1"/>
+          </a:effectRef>
+          <a:fontRef idx="minor">
+            <a:schemeClr val="lt1"/>
+          </a:fontRef>
+        </p:style>
+        <p:txBody>
+          <a:bodyPr rtlCol="0" anchor="ctr"/>
+          <a:lstStyle/>
+          <a:p>
+            <a:pPr algn="ctr"/>
+          </a:p>
+        </p:txBody>
+      </p:sp>
+      <p:sp>
+        <p:nvSpPr>
+          <p:cNvPr id="11" name="TextBox 10"/>
+          <p:cNvSpPr txBox="1"/>
+          <p:nvPr/>
+        </p:nvSpPr>
+        <p:spPr>
+          <a:xfrm>
+            <a:off x="1600000" y="1400000"/>
+            <a:ext cx="10150000" cy="620000"/>
+          </a:xfrm>
+          <a:prstGeom prst="rect">
+            <a:avLst/>
+          </a:prstGeom>
+          <a:noFill/>
+        </p:spPr>
+        <p:txBody>
+          <a:bodyPr wrap="square" anchor="ctr">
+            <a:spAutoFit/>
+          </a:bodyPr>
+          <a:lstStyle/>
+          <a:p>
+            <a:pPr algn="l"/>
+            <a:r>
+              <a:rPr sz="1300" b="0">
                 <a:solidFill>
                   <a:srgbClr val="333333"/>
                 </a:solidFill>
@@ -6251,17 +8267,161 @@
                 <a:ea typeface="Open Sans"/>
                 <a:cs typeface="Open Sans"/>
               </a:rPr>
-              <a:t>•  Уточните название и время приема</a:t>
-            </a:r>
-          </a:p>
-          <a:p>
-            <a:pPr algn="l">
-              <a:spcAft>
-                <a:spcPts val="800"/>
-              </a:spcAft>
-            </a:pPr>
-            <a:r>
-              <a:rPr sz="1400" b="0">
+              <a:t>По просьбе пострадавшего найдите лекарство в указанном месте.</a:t>
+            </a:r>
+          </a:p>
+        </p:txBody>
+      </p:sp>
+      <p:sp>
+        <p:nvSpPr>
+          <p:cNvPr id="12" name="Oval 11"/>
+          <p:cNvSpPr/>
+          <p:nvPr/>
+        </p:nvSpPr>
+        <p:spPr>
+          <a:xfrm>
+            <a:off x="700000" y="2100000"/>
+            <a:ext cx="500000" cy="500000"/>
+          </a:xfrm>
+          <a:prstGeom prst="ellipse">
+            <a:avLst/>
+          </a:prstGeom>
+          <a:solidFill>
+            <a:srgbClr val="555555"/>
+          </a:solidFill>
+          <a:ln>
+            <a:noFill/>
+          </a:ln>
+        </p:spPr>
+        <p:style>
+          <a:lnRef idx="1">
+            <a:schemeClr val="accent1"/>
+          </a:lnRef>
+          <a:fillRef idx="3">
+            <a:schemeClr val="accent1"/>
+          </a:fillRef>
+          <a:effectRef idx="2">
+            <a:schemeClr val="accent1"/>
+          </a:effectRef>
+          <a:fontRef idx="minor">
+            <a:schemeClr val="lt1"/>
+          </a:fontRef>
+        </p:style>
+        <p:txBody>
+          <a:bodyPr rtlCol="0" anchor="ctr"/>
+          <a:lstStyle/>
+          <a:p>
+            <a:pPr algn="ctr"/>
+          </a:p>
+        </p:txBody>
+      </p:sp>
+      <p:sp>
+        <p:nvSpPr>
+          <p:cNvPr id="13" name="TextBox 12"/>
+          <p:cNvSpPr txBox="1"/>
+          <p:nvPr/>
+        </p:nvSpPr>
+        <p:spPr>
+          <a:xfrm>
+            <a:off x="700000" y="2100000"/>
+            <a:ext cx="500000" cy="500000"/>
+          </a:xfrm>
+          <a:prstGeom prst="rect">
+            <a:avLst/>
+          </a:prstGeom>
+          <a:noFill/>
+        </p:spPr>
+        <p:txBody>
+          <a:bodyPr wrap="square" anchor="ctr">
+            <a:spAutoFit/>
+          </a:bodyPr>
+          <a:lstStyle/>
+          <a:p>
+            <a:pPr algn="ctr"/>
+            <a:r>
+              <a:rPr sz="1300" b="1">
+                <a:solidFill>
+                  <a:srgbClr val="FFFFFF"/>
+                </a:solidFill>
+                <a:latin typeface="Open Sans"/>
+                <a:ea typeface="Open Sans"/>
+                <a:cs typeface="Open Sans"/>
+              </a:rPr>
+              <a:t>2</a:t>
+            </a:r>
+          </a:p>
+        </p:txBody>
+      </p:sp>
+      <p:sp>
+        <p:nvSpPr>
+          <p:cNvPr id="14" name="Rectangle 13"/>
+          <p:cNvSpPr/>
+          <p:nvPr/>
+        </p:nvSpPr>
+        <p:spPr>
+          <a:xfrm>
+            <a:off x="1400000" y="2100000"/>
+            <a:ext cx="10550000" cy="620000"/>
+          </a:xfrm>
+          <a:prstGeom prst="rect">
+            <a:avLst/>
+          </a:prstGeom>
+          <a:solidFill>
+            <a:srgbClr val="FFFFFF"/>
+          </a:solidFill>
+          <a:ln w="12700">
+            <a:solidFill>
+              <a:srgbClr val="999999"/>
+            </a:solidFill>
+          </a:ln>
+        </p:spPr>
+        <p:style>
+          <a:lnRef idx="1">
+            <a:schemeClr val="accent1"/>
+          </a:lnRef>
+          <a:fillRef idx="3">
+            <a:schemeClr val="accent1"/>
+          </a:fillRef>
+          <a:effectRef idx="2">
+            <a:schemeClr val="accent1"/>
+          </a:effectRef>
+          <a:fontRef idx="minor">
+            <a:schemeClr val="lt1"/>
+          </a:fontRef>
+        </p:style>
+        <p:txBody>
+          <a:bodyPr rtlCol="0" anchor="ctr"/>
+          <a:lstStyle/>
+          <a:p>
+            <a:pPr algn="ctr"/>
+          </a:p>
+        </p:txBody>
+      </p:sp>
+      <p:sp>
+        <p:nvSpPr>
+          <p:cNvPr id="15" name="TextBox 14"/>
+          <p:cNvSpPr txBox="1"/>
+          <p:nvPr/>
+        </p:nvSpPr>
+        <p:spPr>
+          <a:xfrm>
+            <a:off x="1600000" y="2100000"/>
+            <a:ext cx="10150000" cy="620000"/>
+          </a:xfrm>
+          <a:prstGeom prst="rect">
+            <a:avLst/>
+          </a:prstGeom>
+          <a:noFill/>
+        </p:spPr>
+        <p:txBody>
+          <a:bodyPr wrap="square" anchor="ctr">
+            <a:spAutoFit/>
+          </a:bodyPr>
+          <a:lstStyle/>
+          <a:p>
+            <a:pPr algn="l"/>
+            <a:r>
+              <a:rPr sz="1300" b="0">
                 <a:solidFill>
                   <a:srgbClr val="333333"/>
                 </a:solidFill>
@@ -6269,17 +8429,161 @@
                 <a:ea typeface="Open Sans"/>
                 <a:cs typeface="Open Sans"/>
               </a:rPr>
-              <a:t>•  Наблюдайте за состоянием</a:t>
-            </a:r>
-          </a:p>
-          <a:p>
-            <a:pPr algn="l">
-              <a:spcAft>
-                <a:spcPts val="800"/>
-              </a:spcAft>
-            </a:pPr>
-            <a:r>
-              <a:rPr sz="1400" b="0">
+              <a:t>Прочитайте ему название на упаковке и убедитесь, что это его препарат.</a:t>
+            </a:r>
+          </a:p>
+        </p:txBody>
+      </p:sp>
+      <p:sp>
+        <p:nvSpPr>
+          <p:cNvPr id="16" name="Oval 15"/>
+          <p:cNvSpPr/>
+          <p:nvPr/>
+        </p:nvSpPr>
+        <p:spPr>
+          <a:xfrm>
+            <a:off x="700000" y="2800000"/>
+            <a:ext cx="500000" cy="500000"/>
+          </a:xfrm>
+          <a:prstGeom prst="ellipse">
+            <a:avLst/>
+          </a:prstGeom>
+          <a:solidFill>
+            <a:srgbClr val="555555"/>
+          </a:solidFill>
+          <a:ln>
+            <a:noFill/>
+          </a:ln>
+        </p:spPr>
+        <p:style>
+          <a:lnRef idx="1">
+            <a:schemeClr val="accent1"/>
+          </a:lnRef>
+          <a:fillRef idx="3">
+            <a:schemeClr val="accent1"/>
+          </a:fillRef>
+          <a:effectRef idx="2">
+            <a:schemeClr val="accent1"/>
+          </a:effectRef>
+          <a:fontRef idx="minor">
+            <a:schemeClr val="lt1"/>
+          </a:fontRef>
+        </p:style>
+        <p:txBody>
+          <a:bodyPr rtlCol="0" anchor="ctr"/>
+          <a:lstStyle/>
+          <a:p>
+            <a:pPr algn="ctr"/>
+          </a:p>
+        </p:txBody>
+      </p:sp>
+      <p:sp>
+        <p:nvSpPr>
+          <p:cNvPr id="17" name="TextBox 16"/>
+          <p:cNvSpPr txBox="1"/>
+          <p:nvPr/>
+        </p:nvSpPr>
+        <p:spPr>
+          <a:xfrm>
+            <a:off x="700000" y="2800000"/>
+            <a:ext cx="500000" cy="500000"/>
+          </a:xfrm>
+          <a:prstGeom prst="rect">
+            <a:avLst/>
+          </a:prstGeom>
+          <a:noFill/>
+        </p:spPr>
+        <p:txBody>
+          <a:bodyPr wrap="square" anchor="ctr">
+            <a:spAutoFit/>
+          </a:bodyPr>
+          <a:lstStyle/>
+          <a:p>
+            <a:pPr algn="ctr"/>
+            <a:r>
+              <a:rPr sz="1300" b="1">
+                <a:solidFill>
+                  <a:srgbClr val="FFFFFF"/>
+                </a:solidFill>
+                <a:latin typeface="Open Sans"/>
+                <a:ea typeface="Open Sans"/>
+                <a:cs typeface="Open Sans"/>
+              </a:rPr>
+              <a:t>3</a:t>
+            </a:r>
+          </a:p>
+        </p:txBody>
+      </p:sp>
+      <p:sp>
+        <p:nvSpPr>
+          <p:cNvPr id="18" name="Rectangle 17"/>
+          <p:cNvSpPr/>
+          <p:nvPr/>
+        </p:nvSpPr>
+        <p:spPr>
+          <a:xfrm>
+            <a:off x="1400000" y="2800000"/>
+            <a:ext cx="10550000" cy="620000"/>
+          </a:xfrm>
+          <a:prstGeom prst="rect">
+            <a:avLst/>
+          </a:prstGeom>
+          <a:solidFill>
+            <a:srgbClr val="FFFFFF"/>
+          </a:solidFill>
+          <a:ln w="12700">
+            <a:solidFill>
+              <a:srgbClr val="999999"/>
+            </a:solidFill>
+          </a:ln>
+        </p:spPr>
+        <p:style>
+          <a:lnRef idx="1">
+            <a:schemeClr val="accent1"/>
+          </a:lnRef>
+          <a:fillRef idx="3">
+            <a:schemeClr val="accent1"/>
+          </a:fillRef>
+          <a:effectRef idx="2">
+            <a:schemeClr val="accent1"/>
+          </a:effectRef>
+          <a:fontRef idx="minor">
+            <a:schemeClr val="lt1"/>
+          </a:fontRef>
+        </p:style>
+        <p:txBody>
+          <a:bodyPr rtlCol="0" anchor="ctr"/>
+          <a:lstStyle/>
+          <a:p>
+            <a:pPr algn="ctr"/>
+          </a:p>
+        </p:txBody>
+      </p:sp>
+      <p:sp>
+        <p:nvSpPr>
+          <p:cNvPr id="19" name="TextBox 18"/>
+          <p:cNvSpPr txBox="1"/>
+          <p:nvPr/>
+        </p:nvSpPr>
+        <p:spPr>
+          <a:xfrm>
+            <a:off x="1600000" y="2800000"/>
+            <a:ext cx="10150000" cy="620000"/>
+          </a:xfrm>
+          <a:prstGeom prst="rect">
+            <a:avLst/>
+          </a:prstGeom>
+          <a:noFill/>
+        </p:spPr>
+        <p:txBody>
+          <a:bodyPr wrap="square" anchor="ctr">
+            <a:spAutoFit/>
+          </a:bodyPr>
+          <a:lstStyle/>
+          <a:p>
+            <a:pPr algn="l"/>
+            <a:r>
+              <a:rPr sz="1300" b="0">
                 <a:solidFill>
                   <a:srgbClr val="333333"/>
                 </a:solidFill>
@@ -6287,17 +8591,161 @@
                 <a:ea typeface="Open Sans"/>
                 <a:cs typeface="Open Sans"/>
               </a:rPr>
-              <a:t>•  При ухудшении вызовите скорую помощь</a:t>
-            </a:r>
-          </a:p>
-          <a:p>
-            <a:pPr algn="l">
-              <a:spcAft>
-                <a:spcPts val="800"/>
-              </a:spcAft>
-            </a:pPr>
-            <a:r>
-              <a:rPr sz="1400" b="0">
+              <a:t>Помогите открыть упаковку или подготовить назначенное устройство.</a:t>
+            </a:r>
+          </a:p>
+        </p:txBody>
+      </p:sp>
+      <p:sp>
+        <p:nvSpPr>
+          <p:cNvPr id="20" name="Oval 19"/>
+          <p:cNvSpPr/>
+          <p:nvPr/>
+        </p:nvSpPr>
+        <p:spPr>
+          <a:xfrm>
+            <a:off x="700000" y="3500000"/>
+            <a:ext cx="500000" cy="500000"/>
+          </a:xfrm>
+          <a:prstGeom prst="ellipse">
+            <a:avLst/>
+          </a:prstGeom>
+          <a:solidFill>
+            <a:srgbClr val="555555"/>
+          </a:solidFill>
+          <a:ln>
+            <a:noFill/>
+          </a:ln>
+        </p:spPr>
+        <p:style>
+          <a:lnRef idx="1">
+            <a:schemeClr val="accent1"/>
+          </a:lnRef>
+          <a:fillRef idx="3">
+            <a:schemeClr val="accent1"/>
+          </a:fillRef>
+          <a:effectRef idx="2">
+            <a:schemeClr val="accent1"/>
+          </a:effectRef>
+          <a:fontRef idx="minor">
+            <a:schemeClr val="lt1"/>
+          </a:fontRef>
+        </p:style>
+        <p:txBody>
+          <a:bodyPr rtlCol="0" anchor="ctr"/>
+          <a:lstStyle/>
+          <a:p>
+            <a:pPr algn="ctr"/>
+          </a:p>
+        </p:txBody>
+      </p:sp>
+      <p:sp>
+        <p:nvSpPr>
+          <p:cNvPr id="21" name="TextBox 20"/>
+          <p:cNvSpPr txBox="1"/>
+          <p:nvPr/>
+        </p:nvSpPr>
+        <p:spPr>
+          <a:xfrm>
+            <a:off x="700000" y="3500000"/>
+            <a:ext cx="500000" cy="500000"/>
+          </a:xfrm>
+          <a:prstGeom prst="rect">
+            <a:avLst/>
+          </a:prstGeom>
+          <a:noFill/>
+        </p:spPr>
+        <p:txBody>
+          <a:bodyPr wrap="square" anchor="ctr">
+            <a:spAutoFit/>
+          </a:bodyPr>
+          <a:lstStyle/>
+          <a:p>
+            <a:pPr algn="ctr"/>
+            <a:r>
+              <a:rPr sz="1300" b="1">
+                <a:solidFill>
+                  <a:srgbClr val="FFFFFF"/>
+                </a:solidFill>
+                <a:latin typeface="Open Sans"/>
+                <a:ea typeface="Open Sans"/>
+                <a:cs typeface="Open Sans"/>
+              </a:rPr>
+              <a:t>4</a:t>
+            </a:r>
+          </a:p>
+        </p:txBody>
+      </p:sp>
+      <p:sp>
+        <p:nvSpPr>
+          <p:cNvPr id="22" name="Rectangle 21"/>
+          <p:cNvSpPr/>
+          <p:nvPr/>
+        </p:nvSpPr>
+        <p:spPr>
+          <a:xfrm>
+            <a:off x="1400000" y="3500000"/>
+            <a:ext cx="10550000" cy="620000"/>
+          </a:xfrm>
+          <a:prstGeom prst="rect">
+            <a:avLst/>
+          </a:prstGeom>
+          <a:solidFill>
+            <a:srgbClr val="FFFFFF"/>
+          </a:solidFill>
+          <a:ln w="12700">
+            <a:solidFill>
+              <a:srgbClr val="999999"/>
+            </a:solidFill>
+          </a:ln>
+        </p:spPr>
+        <p:style>
+          <a:lnRef idx="1">
+            <a:schemeClr val="accent1"/>
+          </a:lnRef>
+          <a:fillRef idx="3">
+            <a:schemeClr val="accent1"/>
+          </a:fillRef>
+          <a:effectRef idx="2">
+            <a:schemeClr val="accent1"/>
+          </a:effectRef>
+          <a:fontRef idx="minor">
+            <a:schemeClr val="lt1"/>
+          </a:fontRef>
+        </p:style>
+        <p:txBody>
+          <a:bodyPr rtlCol="0" anchor="ctr"/>
+          <a:lstStyle/>
+          <a:p>
+            <a:pPr algn="ctr"/>
+          </a:p>
+        </p:txBody>
+      </p:sp>
+      <p:sp>
+        <p:nvSpPr>
+          <p:cNvPr id="23" name="TextBox 22"/>
+          <p:cNvSpPr txBox="1"/>
+          <p:nvPr/>
+        </p:nvSpPr>
+        <p:spPr>
+          <a:xfrm>
+            <a:off x="1600000" y="3500000"/>
+            <a:ext cx="10150000" cy="620000"/>
+          </a:xfrm>
+          <a:prstGeom prst="rect">
+            <a:avLst/>
+          </a:prstGeom>
+          <a:noFill/>
+        </p:spPr>
+        <p:txBody>
+          <a:bodyPr wrap="square" anchor="ctr">
+            <a:spAutoFit/>
+          </a:bodyPr>
+          <a:lstStyle/>
+          <a:p>
+            <a:pPr algn="l"/>
+            <a:r>
+              <a:rPr sz="1300" b="0">
                 <a:solidFill>
                   <a:srgbClr val="333333"/>
                 </a:solidFill>
@@ -6305,7 +8753,331 @@
                 <a:ea typeface="Open Sans"/>
                 <a:cs typeface="Open Sans"/>
               </a:rPr>
-              <a:t>•  Передайте сведения прибывшим специалистам</a:t>
+              <a:t>Подайте препарат, чтобы человек по возможности принял его самостоятельно.</a:t>
+            </a:r>
+          </a:p>
+        </p:txBody>
+      </p:sp>
+      <p:sp>
+        <p:nvSpPr>
+          <p:cNvPr id="24" name="Oval 23"/>
+          <p:cNvSpPr/>
+          <p:nvPr/>
+        </p:nvSpPr>
+        <p:spPr>
+          <a:xfrm>
+            <a:off x="700000" y="4200000"/>
+            <a:ext cx="500000" cy="500000"/>
+          </a:xfrm>
+          <a:prstGeom prst="ellipse">
+            <a:avLst/>
+          </a:prstGeom>
+          <a:solidFill>
+            <a:srgbClr val="555555"/>
+          </a:solidFill>
+          <a:ln>
+            <a:noFill/>
+          </a:ln>
+        </p:spPr>
+        <p:style>
+          <a:lnRef idx="1">
+            <a:schemeClr val="accent1"/>
+          </a:lnRef>
+          <a:fillRef idx="3">
+            <a:schemeClr val="accent1"/>
+          </a:fillRef>
+          <a:effectRef idx="2">
+            <a:schemeClr val="accent1"/>
+          </a:effectRef>
+          <a:fontRef idx="minor">
+            <a:schemeClr val="lt1"/>
+          </a:fontRef>
+        </p:style>
+        <p:txBody>
+          <a:bodyPr rtlCol="0" anchor="ctr"/>
+          <a:lstStyle/>
+          <a:p>
+            <a:pPr algn="ctr"/>
+          </a:p>
+        </p:txBody>
+      </p:sp>
+      <p:sp>
+        <p:nvSpPr>
+          <p:cNvPr id="25" name="TextBox 24"/>
+          <p:cNvSpPr txBox="1"/>
+          <p:nvPr/>
+        </p:nvSpPr>
+        <p:spPr>
+          <a:xfrm>
+            <a:off x="700000" y="4200000"/>
+            <a:ext cx="500000" cy="500000"/>
+          </a:xfrm>
+          <a:prstGeom prst="rect">
+            <a:avLst/>
+          </a:prstGeom>
+          <a:noFill/>
+        </p:spPr>
+        <p:txBody>
+          <a:bodyPr wrap="square" anchor="ctr">
+            <a:spAutoFit/>
+          </a:bodyPr>
+          <a:lstStyle/>
+          <a:p>
+            <a:pPr algn="ctr"/>
+            <a:r>
+              <a:rPr sz="1300" b="1">
+                <a:solidFill>
+                  <a:srgbClr val="FFFFFF"/>
+                </a:solidFill>
+                <a:latin typeface="Open Sans"/>
+                <a:ea typeface="Open Sans"/>
+                <a:cs typeface="Open Sans"/>
+              </a:rPr>
+              <a:t>5</a:t>
+            </a:r>
+          </a:p>
+        </p:txBody>
+      </p:sp>
+      <p:sp>
+        <p:nvSpPr>
+          <p:cNvPr id="26" name="Rectangle 25"/>
+          <p:cNvSpPr/>
+          <p:nvPr/>
+        </p:nvSpPr>
+        <p:spPr>
+          <a:xfrm>
+            <a:off x="1400000" y="4200000"/>
+            <a:ext cx="10550000" cy="620000"/>
+          </a:xfrm>
+          <a:prstGeom prst="rect">
+            <a:avLst/>
+          </a:prstGeom>
+          <a:solidFill>
+            <a:srgbClr val="FFFFFF"/>
+          </a:solidFill>
+          <a:ln w="12700">
+            <a:solidFill>
+              <a:srgbClr val="999999"/>
+            </a:solidFill>
+          </a:ln>
+        </p:spPr>
+        <p:style>
+          <a:lnRef idx="1">
+            <a:schemeClr val="accent1"/>
+          </a:lnRef>
+          <a:fillRef idx="3">
+            <a:schemeClr val="accent1"/>
+          </a:fillRef>
+          <a:effectRef idx="2">
+            <a:schemeClr val="accent1"/>
+          </a:effectRef>
+          <a:fontRef idx="minor">
+            <a:schemeClr val="lt1"/>
+          </a:fontRef>
+        </p:style>
+        <p:txBody>
+          <a:bodyPr rtlCol="0" anchor="ctr"/>
+          <a:lstStyle/>
+          <a:p>
+            <a:pPr algn="ctr"/>
+          </a:p>
+        </p:txBody>
+      </p:sp>
+      <p:sp>
+        <p:nvSpPr>
+          <p:cNvPr id="27" name="TextBox 26"/>
+          <p:cNvSpPr txBox="1"/>
+          <p:nvPr/>
+        </p:nvSpPr>
+        <p:spPr>
+          <a:xfrm>
+            <a:off x="1600000" y="4200000"/>
+            <a:ext cx="10150000" cy="620000"/>
+          </a:xfrm>
+          <a:prstGeom prst="rect">
+            <a:avLst/>
+          </a:prstGeom>
+          <a:noFill/>
+        </p:spPr>
+        <p:txBody>
+          <a:bodyPr wrap="square" anchor="ctr">
+            <a:spAutoFit/>
+          </a:bodyPr>
+          <a:lstStyle/>
+          <a:p>
+            <a:pPr algn="l"/>
+            <a:r>
+              <a:rPr sz="1300" b="0">
+                <a:solidFill>
+                  <a:srgbClr val="333333"/>
+                </a:solidFill>
+                <a:latin typeface="Open Sans"/>
+                <a:ea typeface="Open Sans"/>
+                <a:cs typeface="Open Sans"/>
+              </a:rPr>
+              <a:t>При разрешенном приеме внутрь дайте воду для запивания.</a:t>
+            </a:r>
+          </a:p>
+        </p:txBody>
+      </p:sp>
+      <p:sp>
+        <p:nvSpPr>
+          <p:cNvPr id="28" name="Oval 27"/>
+          <p:cNvSpPr/>
+          <p:nvPr/>
+        </p:nvSpPr>
+        <p:spPr>
+          <a:xfrm>
+            <a:off x="700000" y="4900000"/>
+            <a:ext cx="500000" cy="500000"/>
+          </a:xfrm>
+          <a:prstGeom prst="ellipse">
+            <a:avLst/>
+          </a:prstGeom>
+          <a:solidFill>
+            <a:srgbClr val="555555"/>
+          </a:solidFill>
+          <a:ln>
+            <a:noFill/>
+          </a:ln>
+        </p:spPr>
+        <p:style>
+          <a:lnRef idx="1">
+            <a:schemeClr val="accent1"/>
+          </a:lnRef>
+          <a:fillRef idx="3">
+            <a:schemeClr val="accent1"/>
+          </a:fillRef>
+          <a:effectRef idx="2">
+            <a:schemeClr val="accent1"/>
+          </a:effectRef>
+          <a:fontRef idx="minor">
+            <a:schemeClr val="lt1"/>
+          </a:fontRef>
+        </p:style>
+        <p:txBody>
+          <a:bodyPr rtlCol="0" anchor="ctr"/>
+          <a:lstStyle/>
+          <a:p>
+            <a:pPr algn="ctr"/>
+          </a:p>
+        </p:txBody>
+      </p:sp>
+      <p:sp>
+        <p:nvSpPr>
+          <p:cNvPr id="29" name="TextBox 28"/>
+          <p:cNvSpPr txBox="1"/>
+          <p:nvPr/>
+        </p:nvSpPr>
+        <p:spPr>
+          <a:xfrm>
+            <a:off x="700000" y="4900000"/>
+            <a:ext cx="500000" cy="500000"/>
+          </a:xfrm>
+          <a:prstGeom prst="rect">
+            <a:avLst/>
+          </a:prstGeom>
+          <a:noFill/>
+        </p:spPr>
+        <p:txBody>
+          <a:bodyPr wrap="square" anchor="ctr">
+            <a:spAutoFit/>
+          </a:bodyPr>
+          <a:lstStyle/>
+          <a:p>
+            <a:pPr algn="ctr"/>
+            <a:r>
+              <a:rPr sz="1300" b="1">
+                <a:solidFill>
+                  <a:srgbClr val="FFFFFF"/>
+                </a:solidFill>
+                <a:latin typeface="Open Sans"/>
+                <a:ea typeface="Open Sans"/>
+                <a:cs typeface="Open Sans"/>
+              </a:rPr>
+              <a:t>6</a:t>
+            </a:r>
+          </a:p>
+        </p:txBody>
+      </p:sp>
+      <p:sp>
+        <p:nvSpPr>
+          <p:cNvPr id="30" name="Rectangle 29"/>
+          <p:cNvSpPr/>
+          <p:nvPr/>
+        </p:nvSpPr>
+        <p:spPr>
+          <a:xfrm>
+            <a:off x="1400000" y="4900000"/>
+            <a:ext cx="10550000" cy="620000"/>
+          </a:xfrm>
+          <a:prstGeom prst="rect">
+            <a:avLst/>
+          </a:prstGeom>
+          <a:solidFill>
+            <a:srgbClr val="FFFFFF"/>
+          </a:solidFill>
+          <a:ln w="12700">
+            <a:solidFill>
+              <a:srgbClr val="999999"/>
+            </a:solidFill>
+          </a:ln>
+        </p:spPr>
+        <p:style>
+          <a:lnRef idx="1">
+            <a:schemeClr val="accent1"/>
+          </a:lnRef>
+          <a:fillRef idx="3">
+            <a:schemeClr val="accent1"/>
+          </a:fillRef>
+          <a:effectRef idx="2">
+            <a:schemeClr val="accent1"/>
+          </a:effectRef>
+          <a:fontRef idx="minor">
+            <a:schemeClr val="lt1"/>
+          </a:fontRef>
+        </p:style>
+        <p:txBody>
+          <a:bodyPr rtlCol="0" anchor="ctr"/>
+          <a:lstStyle/>
+          <a:p>
+            <a:pPr algn="ctr"/>
+          </a:p>
+        </p:txBody>
+      </p:sp>
+      <p:sp>
+        <p:nvSpPr>
+          <p:cNvPr id="31" name="TextBox 30"/>
+          <p:cNvSpPr txBox="1"/>
+          <p:nvPr/>
+        </p:nvSpPr>
+        <p:spPr>
+          <a:xfrm>
+            <a:off x="1600000" y="4900000"/>
+            <a:ext cx="10150000" cy="620000"/>
+          </a:xfrm>
+          <a:prstGeom prst="rect">
+            <a:avLst/>
+          </a:prstGeom>
+          <a:noFill/>
+        </p:spPr>
+        <p:txBody>
+          <a:bodyPr wrap="square" anchor="ctr">
+            <a:spAutoFit/>
+          </a:bodyPr>
+          <a:lstStyle/>
+          <a:p>
+            <a:pPr algn="l"/>
+            <a:r>
+              <a:rPr sz="1300" b="0">
+                <a:solidFill>
+                  <a:srgbClr val="333333"/>
+                </a:solidFill>
+                <a:latin typeface="Open Sans"/>
+                <a:ea typeface="Open Sans"/>
+                <a:cs typeface="Open Sans"/>
+              </a:rPr>
+              <a:t>Помогите занять положение, соответствующее его обычному способу применения.</a:t>
             </a:r>
           </a:p>
         </p:txBody>
@@ -6403,7 +9175,7 @@
                 <a:ea typeface="Open Sans"/>
                 <a:cs typeface="Open Sans"/>
               </a:rPr>
-              <a:t>ГЛАВНОЕ ЗАПОМНИТЬ</a:t>
+              <a:t>ДОПУСТИМО И НЕДОПУСТИМО</a:t>
             </a:r>
           </a:p>
         </p:txBody>
@@ -6570,89 +9342,75 @@
       </p:sp>
       <p:sp>
         <p:nvSpPr>
-          <p:cNvPr id="8" name="Rectangle 7"/>
-          <p:cNvSpPr/>
-          <p:nvPr/>
-        </p:nvSpPr>
-        <p:spPr>
-          <a:xfrm>
-            <a:off x="700000" y="1450000"/>
-            <a:ext cx="11000000" cy="850000"/>
-          </a:xfrm>
-          <a:prstGeom prst="rect">
-            <a:avLst/>
-          </a:prstGeom>
-          <a:solidFill>
-            <a:srgbClr val="FFFFFF"/>
-          </a:solidFill>
-          <a:ln w="12700">
-            <a:solidFill>
-              <a:srgbClr val="999999"/>
-            </a:solidFill>
-          </a:ln>
-        </p:spPr>
-        <p:style>
-          <a:lnRef idx="1">
-            <a:schemeClr val="accent1"/>
-          </a:lnRef>
-          <a:fillRef idx="3">
-            <a:schemeClr val="accent1"/>
-          </a:fillRef>
-          <a:effectRef idx="2">
-            <a:schemeClr val="accent1"/>
-          </a:effectRef>
-          <a:fontRef idx="minor">
-            <a:schemeClr val="lt1"/>
-          </a:fontRef>
-        </p:style>
-        <p:txBody>
-          <a:bodyPr rtlCol="0" anchor="ctr"/>
-          <a:lstStyle/>
-          <a:p>
-            <a:pPr algn="ctr"/>
-          </a:p>
-        </p:txBody>
-      </p:sp>
-      <p:sp>
-        <p:nvSpPr>
-          <p:cNvPr id="9" name="Rectangle 8"/>
-          <p:cNvSpPr/>
-          <p:nvPr/>
-        </p:nvSpPr>
-        <p:spPr>
-          <a:xfrm>
-            <a:off x="700000" y="1450000"/>
-            <a:ext cx="90000" cy="850000"/>
-          </a:xfrm>
-          <a:prstGeom prst="rect">
-            <a:avLst/>
-          </a:prstGeom>
-          <a:solidFill>
-            <a:srgbClr val="CC0000"/>
-          </a:solidFill>
-          <a:ln>
-            <a:noFill/>
-          </a:ln>
-        </p:spPr>
-        <p:style>
-          <a:lnRef idx="1">
-            <a:schemeClr val="accent1"/>
-          </a:lnRef>
-          <a:fillRef idx="3">
-            <a:schemeClr val="accent1"/>
-          </a:fillRef>
-          <a:effectRef idx="2">
-            <a:schemeClr val="accent1"/>
-          </a:effectRef>
-          <a:fontRef idx="minor">
-            <a:schemeClr val="lt1"/>
-          </a:fontRef>
-        </p:style>
-        <p:txBody>
-          <a:bodyPr rtlCol="0" anchor="ctr"/>
-          <a:lstStyle/>
-          <a:p>
-            <a:pPr algn="ctr"/>
+          <p:cNvPr id="8" name="TextBox 7"/>
+          <p:cNvSpPr txBox="1"/>
+          <p:nvPr/>
+        </p:nvSpPr>
+        <p:spPr>
+          <a:xfrm>
+            <a:off x="700000" y="1400000"/>
+            <a:ext cx="5400000" cy="400000"/>
+          </a:xfrm>
+          <a:prstGeom prst="rect">
+            <a:avLst/>
+          </a:prstGeom>
+          <a:noFill/>
+        </p:spPr>
+        <p:txBody>
+          <a:bodyPr wrap="square" anchor="t">
+            <a:spAutoFit/>
+          </a:bodyPr>
+          <a:lstStyle/>
+          <a:p>
+            <a:pPr algn="l"/>
+            <a:r>
+              <a:rPr sz="1400" b="1">
+                <a:solidFill>
+                  <a:srgbClr val="333333"/>
+                </a:solidFill>
+                <a:latin typeface="Open Sans"/>
+                <a:ea typeface="Open Sans"/>
+                <a:cs typeface="Open Sans"/>
+              </a:rPr>
+              <a:t>Допустимо</a:t>
+            </a:r>
+          </a:p>
+        </p:txBody>
+      </p:sp>
+      <p:sp>
+        <p:nvSpPr>
+          <p:cNvPr id="9" name="TextBox 8"/>
+          <p:cNvSpPr txBox="1"/>
+          <p:nvPr/>
+        </p:nvSpPr>
+        <p:spPr>
+          <a:xfrm>
+            <a:off x="6600000" y="1400000"/>
+            <a:ext cx="5400000" cy="400000"/>
+          </a:xfrm>
+          <a:prstGeom prst="rect">
+            <a:avLst/>
+          </a:prstGeom>
+          <a:noFill/>
+        </p:spPr>
+        <p:txBody>
+          <a:bodyPr wrap="square" anchor="t">
+            <a:spAutoFit/>
+          </a:bodyPr>
+          <a:lstStyle/>
+          <a:p>
+            <a:pPr algn="l"/>
+            <a:r>
+              <a:rPr sz="1400" b="1">
+                <a:solidFill>
+                  <a:srgbClr val="333333"/>
+                </a:solidFill>
+                <a:latin typeface="Open Sans"/>
+                <a:ea typeface="Open Sans"/>
+                <a:cs typeface="Open Sans"/>
+              </a:rPr>
+              <a:t>Недопустимо</a:t>
+            </a:r>
           </a:p>
         </p:txBody>
       </p:sp>
@@ -6664,8 +9422,8 @@
         </p:nvSpPr>
         <p:spPr>
           <a:xfrm>
-            <a:off x="1000000" y="1550000"/>
-            <a:ext cx="10400000" cy="650000"/>
+            <a:off x="700000" y="1850000"/>
+            <a:ext cx="5400000" cy="4000000"/>
           </a:xfrm>
           <a:prstGeom prst="rect">
             <a:avLst/>
@@ -6673,12 +9431,16 @@
           <a:noFill/>
         </p:spPr>
         <p:txBody>
-          <a:bodyPr wrap="square" anchor="ctr">
+          <a:bodyPr wrap="square">
             <a:spAutoFit/>
           </a:bodyPr>
           <a:lstStyle/>
           <a:p>
-            <a:pPr algn="l"/>
+            <a:pPr algn="l">
+              <a:spcAft>
+                <a:spcPts val="800"/>
+              </a:spcAft>
+            </a:pPr>
             <a:r>
               <a:rPr sz="1300" b="0">
                 <a:solidFill>
@@ -6688,109 +9450,93 @@
                 <a:ea typeface="Open Sans"/>
                 <a:cs typeface="Open Sans"/>
               </a:rPr>
-              <a:t>Только лекарство пострадавшего</a:t>
-            </a:r>
-          </a:p>
-        </p:txBody>
-      </p:sp>
-      <p:sp>
-        <p:nvSpPr>
-          <p:cNvPr id="11" name="Rectangle 10"/>
-          <p:cNvSpPr/>
-          <p:nvPr/>
-        </p:nvSpPr>
-        <p:spPr>
-          <a:xfrm>
-            <a:off x="700000" y="2400000"/>
-            <a:ext cx="11000000" cy="850000"/>
-          </a:xfrm>
-          <a:prstGeom prst="rect">
-            <a:avLst/>
-          </a:prstGeom>
-          <a:solidFill>
-            <a:srgbClr val="FFFFFF"/>
-          </a:solidFill>
-          <a:ln w="12700">
-            <a:solidFill>
-              <a:srgbClr val="999999"/>
-            </a:solidFill>
-          </a:ln>
-        </p:spPr>
-        <p:style>
-          <a:lnRef idx="1">
-            <a:schemeClr val="accent1"/>
-          </a:lnRef>
-          <a:fillRef idx="3">
-            <a:schemeClr val="accent1"/>
-          </a:fillRef>
-          <a:effectRef idx="2">
-            <a:schemeClr val="accent1"/>
-          </a:effectRef>
-          <a:fontRef idx="minor">
-            <a:schemeClr val="lt1"/>
-          </a:fontRef>
-        </p:style>
-        <p:txBody>
-          <a:bodyPr rtlCol="0" anchor="ctr"/>
-          <a:lstStyle/>
-          <a:p>
-            <a:pPr algn="ctr"/>
-          </a:p>
-        </p:txBody>
-      </p:sp>
-      <p:sp>
-        <p:nvSpPr>
-          <p:cNvPr id="12" name="Rectangle 11"/>
-          <p:cNvSpPr/>
-          <p:nvPr/>
-        </p:nvSpPr>
-        <p:spPr>
-          <a:xfrm>
-            <a:off x="700000" y="2400000"/>
-            <a:ext cx="90000" cy="850000"/>
-          </a:xfrm>
-          <a:prstGeom prst="rect">
-            <a:avLst/>
-          </a:prstGeom>
-          <a:solidFill>
-            <a:srgbClr val="CC0000"/>
-          </a:solidFill>
-          <a:ln>
-            <a:noFill/>
-          </a:ln>
-        </p:spPr>
-        <p:style>
-          <a:lnRef idx="1">
-            <a:schemeClr val="accent1"/>
-          </a:lnRef>
-          <a:fillRef idx="3">
-            <a:schemeClr val="accent1"/>
-          </a:fillRef>
-          <a:effectRef idx="2">
-            <a:schemeClr val="accent1"/>
-          </a:effectRef>
-          <a:fontRef idx="minor">
-            <a:schemeClr val="lt1"/>
-          </a:fontRef>
-        </p:style>
-        <p:txBody>
-          <a:bodyPr rtlCol="0" anchor="ctr"/>
-          <a:lstStyle/>
-          <a:p>
-            <a:pPr algn="ctr"/>
-          </a:p>
-        </p:txBody>
-      </p:sp>
-      <p:sp>
-        <p:nvSpPr>
-          <p:cNvPr id="13" name="TextBox 12"/>
+              <a:t>•  достать препарат по указанию пострадавшего</a:t>
+            </a:r>
+          </a:p>
+          <a:p>
+            <a:pPr algn="l">
+              <a:spcAft>
+                <a:spcPts val="800"/>
+              </a:spcAft>
+            </a:pPr>
+            <a:r>
+              <a:rPr sz="1300" b="0">
+                <a:solidFill>
+                  <a:srgbClr val="333333"/>
+                </a:solidFill>
+                <a:latin typeface="Open Sans"/>
+                <a:ea typeface="Open Sans"/>
+                <a:cs typeface="Open Sans"/>
+              </a:rPr>
+              <a:t>•  открыть упаковку и подать назначенную дозу</a:t>
+            </a:r>
+          </a:p>
+          <a:p>
+            <a:pPr algn="l">
+              <a:spcAft>
+                <a:spcPts val="800"/>
+              </a:spcAft>
+            </a:pPr>
+            <a:r>
+              <a:rPr sz="1300" b="0">
+                <a:solidFill>
+                  <a:srgbClr val="333333"/>
+                </a:solidFill>
+                <a:latin typeface="Open Sans"/>
+                <a:ea typeface="Open Sans"/>
+                <a:cs typeface="Open Sans"/>
+              </a:rPr>
+              <a:t>•  помочь удержать привычное устройство</a:t>
+            </a:r>
+          </a:p>
+          <a:p>
+            <a:pPr algn="l">
+              <a:spcAft>
+                <a:spcPts val="800"/>
+              </a:spcAft>
+            </a:pPr>
+            <a:r>
+              <a:rPr sz="1300" b="0">
+                <a:solidFill>
+                  <a:srgbClr val="333333"/>
+                </a:solidFill>
+                <a:latin typeface="Open Sans"/>
+                <a:ea typeface="Open Sans"/>
+                <a:cs typeface="Open Sans"/>
+              </a:rPr>
+              <a:t>•  дать воду человеку в ясном сознании</a:t>
+            </a:r>
+          </a:p>
+          <a:p>
+            <a:pPr algn="l">
+              <a:spcAft>
+                <a:spcPts val="800"/>
+              </a:spcAft>
+            </a:pPr>
+            <a:r>
+              <a:rPr sz="1300" b="0">
+                <a:solidFill>
+                  <a:srgbClr val="333333"/>
+                </a:solidFill>
+                <a:latin typeface="Open Sans"/>
+                <a:ea typeface="Open Sans"/>
+                <a:cs typeface="Open Sans"/>
+              </a:rPr>
+              <a:t>•  зафиксировать время приема</a:t>
+            </a:r>
+          </a:p>
+        </p:txBody>
+      </p:sp>
+      <p:sp>
+        <p:nvSpPr>
+          <p:cNvPr id="11" name="TextBox 10"/>
           <p:cNvSpPr txBox="1"/>
           <p:nvPr/>
         </p:nvSpPr>
         <p:spPr>
           <a:xfrm>
-            <a:off x="1000000" y="2500000"/>
-            <a:ext cx="10400000" cy="650000"/>
+            <a:off x="6600000" y="1850000"/>
+            <a:ext cx="5400000" cy="4000000"/>
           </a:xfrm>
           <a:prstGeom prst="rect">
             <a:avLst/>
@@ -6798,12 +9544,16 @@
           <a:noFill/>
         </p:spPr>
         <p:txBody>
-          <a:bodyPr wrap="square" anchor="ctr">
+          <a:bodyPr wrap="square">
             <a:spAutoFit/>
           </a:bodyPr>
           <a:lstStyle/>
           <a:p>
-            <a:pPr algn="l"/>
+            <a:pPr algn="l">
+              <a:spcAft>
+                <a:spcPts val="800"/>
+              </a:spcAft>
+            </a:pPr>
             <a:r>
               <a:rPr sz="1300" b="0">
                 <a:solidFill>
@@ -6813,122 +9563,15 @@
                 <a:ea typeface="Open Sans"/>
                 <a:cs typeface="Open Sans"/>
               </a:rPr>
-              <a:t>Только назначенное врачом</a:t>
-            </a:r>
-          </a:p>
-        </p:txBody>
-      </p:sp>
-      <p:sp>
-        <p:nvSpPr>
-          <p:cNvPr id="14" name="Rectangle 13"/>
-          <p:cNvSpPr/>
-          <p:nvPr/>
-        </p:nvSpPr>
-        <p:spPr>
-          <a:xfrm>
-            <a:off x="700000" y="3350000"/>
-            <a:ext cx="11000000" cy="850000"/>
-          </a:xfrm>
-          <a:prstGeom prst="rect">
-            <a:avLst/>
-          </a:prstGeom>
-          <a:solidFill>
-            <a:srgbClr val="FFFFFF"/>
-          </a:solidFill>
-          <a:ln w="12700">
-            <a:solidFill>
-              <a:srgbClr val="999999"/>
-            </a:solidFill>
-          </a:ln>
-        </p:spPr>
-        <p:style>
-          <a:lnRef idx="1">
-            <a:schemeClr val="accent1"/>
-          </a:lnRef>
-          <a:fillRef idx="3">
-            <a:schemeClr val="accent1"/>
-          </a:fillRef>
-          <a:effectRef idx="2">
-            <a:schemeClr val="accent1"/>
-          </a:effectRef>
-          <a:fontRef idx="minor">
-            <a:schemeClr val="lt1"/>
-          </a:fontRef>
-        </p:style>
-        <p:txBody>
-          <a:bodyPr rtlCol="0" anchor="ctr"/>
-          <a:lstStyle/>
-          <a:p>
-            <a:pPr algn="ctr"/>
-          </a:p>
-        </p:txBody>
-      </p:sp>
-      <p:sp>
-        <p:nvSpPr>
-          <p:cNvPr id="15" name="Rectangle 14"/>
-          <p:cNvSpPr/>
-          <p:nvPr/>
-        </p:nvSpPr>
-        <p:spPr>
-          <a:xfrm>
-            <a:off x="700000" y="3350000"/>
-            <a:ext cx="90000" cy="850000"/>
-          </a:xfrm>
-          <a:prstGeom prst="rect">
-            <a:avLst/>
-          </a:prstGeom>
-          <a:solidFill>
-            <a:srgbClr val="CC0000"/>
-          </a:solidFill>
-          <a:ln>
-            <a:noFill/>
-          </a:ln>
-        </p:spPr>
-        <p:style>
-          <a:lnRef idx="1">
-            <a:schemeClr val="accent1"/>
-          </a:lnRef>
-          <a:fillRef idx="3">
-            <a:schemeClr val="accent1"/>
-          </a:fillRef>
-          <a:effectRef idx="2">
-            <a:schemeClr val="accent1"/>
-          </a:effectRef>
-          <a:fontRef idx="minor">
-            <a:schemeClr val="lt1"/>
-          </a:fontRef>
-        </p:style>
-        <p:txBody>
-          <a:bodyPr rtlCol="0" anchor="ctr"/>
-          <a:lstStyle/>
-          <a:p>
-            <a:pPr algn="ctr"/>
-          </a:p>
-        </p:txBody>
-      </p:sp>
-      <p:sp>
-        <p:nvSpPr>
-          <p:cNvPr id="16" name="TextBox 15"/>
-          <p:cNvSpPr txBox="1"/>
-          <p:nvPr/>
-        </p:nvSpPr>
-        <p:spPr>
-          <a:xfrm>
-            <a:off x="1000000" y="3450000"/>
-            <a:ext cx="10400000" cy="650000"/>
-          </a:xfrm>
-          <a:prstGeom prst="rect">
-            <a:avLst/>
-          </a:prstGeom>
-          <a:noFill/>
-        </p:spPr>
-        <p:txBody>
-          <a:bodyPr wrap="square" anchor="ctr">
-            <a:spAutoFit/>
-          </a:bodyPr>
-          <a:lstStyle/>
-          <a:p>
-            <a:pPr algn="l"/>
+              <a:t>•  предлагать собственное или чужое лекарство</a:t>
+            </a:r>
+          </a:p>
+          <a:p>
+            <a:pPr algn="l">
+              <a:spcAft>
+                <a:spcPts val="800"/>
+              </a:spcAft>
+            </a:pPr>
             <a:r>
               <a:rPr sz="1300" b="0">
                 <a:solidFill>
@@ -6938,122 +9581,15 @@
                 <a:ea typeface="Open Sans"/>
                 <a:cs typeface="Open Sans"/>
               </a:rPr>
-              <a:t>Только для медицинской цели</a:t>
-            </a:r>
-          </a:p>
-        </p:txBody>
-      </p:sp>
-      <p:sp>
-        <p:nvSpPr>
-          <p:cNvPr id="17" name="Rectangle 16"/>
-          <p:cNvSpPr/>
-          <p:nvPr/>
-        </p:nvSpPr>
-        <p:spPr>
-          <a:xfrm>
-            <a:off x="700000" y="4300000"/>
-            <a:ext cx="11000000" cy="850000"/>
-          </a:xfrm>
-          <a:prstGeom prst="rect">
-            <a:avLst/>
-          </a:prstGeom>
-          <a:solidFill>
-            <a:srgbClr val="FFFFFF"/>
-          </a:solidFill>
-          <a:ln w="12700">
-            <a:solidFill>
-              <a:srgbClr val="999999"/>
-            </a:solidFill>
-          </a:ln>
-        </p:spPr>
-        <p:style>
-          <a:lnRef idx="1">
-            <a:schemeClr val="accent1"/>
-          </a:lnRef>
-          <a:fillRef idx="3">
-            <a:schemeClr val="accent1"/>
-          </a:fillRef>
-          <a:effectRef idx="2">
-            <a:schemeClr val="accent1"/>
-          </a:effectRef>
-          <a:fontRef idx="minor">
-            <a:schemeClr val="lt1"/>
-          </a:fontRef>
-        </p:style>
-        <p:txBody>
-          <a:bodyPr rtlCol="0" anchor="ctr"/>
-          <a:lstStyle/>
-          <a:p>
-            <a:pPr algn="ctr"/>
-          </a:p>
-        </p:txBody>
-      </p:sp>
-      <p:sp>
-        <p:nvSpPr>
-          <p:cNvPr id="18" name="Rectangle 17"/>
-          <p:cNvSpPr/>
-          <p:nvPr/>
-        </p:nvSpPr>
-        <p:spPr>
-          <a:xfrm>
-            <a:off x="700000" y="4300000"/>
-            <a:ext cx="90000" cy="850000"/>
-          </a:xfrm>
-          <a:prstGeom prst="rect">
-            <a:avLst/>
-          </a:prstGeom>
-          <a:solidFill>
-            <a:srgbClr val="CC0000"/>
-          </a:solidFill>
-          <a:ln>
-            <a:noFill/>
-          </a:ln>
-        </p:spPr>
-        <p:style>
-          <a:lnRef idx="1">
-            <a:schemeClr val="accent1"/>
-          </a:lnRef>
-          <a:fillRef idx="3">
-            <a:schemeClr val="accent1"/>
-          </a:fillRef>
-          <a:effectRef idx="2">
-            <a:schemeClr val="accent1"/>
-          </a:effectRef>
-          <a:fontRef idx="minor">
-            <a:schemeClr val="lt1"/>
-          </a:fontRef>
-        </p:style>
-        <p:txBody>
-          <a:bodyPr rtlCol="0" anchor="ctr"/>
-          <a:lstStyle/>
-          <a:p>
-            <a:pPr algn="ctr"/>
-          </a:p>
-        </p:txBody>
-      </p:sp>
-      <p:sp>
-        <p:nvSpPr>
-          <p:cNvPr id="19" name="TextBox 18"/>
-          <p:cNvSpPr txBox="1"/>
-          <p:nvPr/>
-        </p:nvSpPr>
-        <p:spPr>
-          <a:xfrm>
-            <a:off x="1000000" y="4400000"/>
-            <a:ext cx="10400000" cy="650000"/>
-          </a:xfrm>
-          <a:prstGeom prst="rect">
-            <a:avLst/>
-          </a:prstGeom>
-          <a:noFill/>
-        </p:spPr>
-        <p:txBody>
-          <a:bodyPr wrap="square" anchor="ctr">
-            <a:spAutoFit/>
-          </a:bodyPr>
-          <a:lstStyle/>
-          <a:p>
-            <a:pPr algn="l"/>
+              <a:t>•  самостоятельно выбирать препарат</a:t>
+            </a:r>
+          </a:p>
+          <a:p>
+            <a:pPr algn="l">
+              <a:spcAft>
+                <a:spcPts val="800"/>
+              </a:spcAft>
+            </a:pPr>
             <a:r>
               <a:rPr sz="1300" b="0">
                 <a:solidFill>
@@ -7063,122 +9599,15 @@
                 <a:ea typeface="Open Sans"/>
                 <a:cs typeface="Open Sans"/>
               </a:rPr>
-              <a:t>Не выбирайте препарат и дозу</a:t>
-            </a:r>
-          </a:p>
-        </p:txBody>
-      </p:sp>
-      <p:sp>
-        <p:nvSpPr>
-          <p:cNvPr id="20" name="Rectangle 19"/>
-          <p:cNvSpPr/>
-          <p:nvPr/>
-        </p:nvSpPr>
-        <p:spPr>
-          <a:xfrm>
-            <a:off x="700000" y="5250000"/>
-            <a:ext cx="11000000" cy="850000"/>
-          </a:xfrm>
-          <a:prstGeom prst="rect">
-            <a:avLst/>
-          </a:prstGeom>
-          <a:solidFill>
-            <a:srgbClr val="FFFFFF"/>
-          </a:solidFill>
-          <a:ln w="12700">
-            <a:solidFill>
-              <a:srgbClr val="999999"/>
-            </a:solidFill>
-          </a:ln>
-        </p:spPr>
-        <p:style>
-          <a:lnRef idx="1">
-            <a:schemeClr val="accent1"/>
-          </a:lnRef>
-          <a:fillRef idx="3">
-            <a:schemeClr val="accent1"/>
-          </a:fillRef>
-          <a:effectRef idx="2">
-            <a:schemeClr val="accent1"/>
-          </a:effectRef>
-          <a:fontRef idx="minor">
-            <a:schemeClr val="lt1"/>
-          </a:fontRef>
-        </p:style>
-        <p:txBody>
-          <a:bodyPr rtlCol="0" anchor="ctr"/>
-          <a:lstStyle/>
-          <a:p>
-            <a:pPr algn="ctr"/>
-          </a:p>
-        </p:txBody>
-      </p:sp>
-      <p:sp>
-        <p:nvSpPr>
-          <p:cNvPr id="21" name="Rectangle 20"/>
-          <p:cNvSpPr/>
-          <p:nvPr/>
-        </p:nvSpPr>
-        <p:spPr>
-          <a:xfrm>
-            <a:off x="700000" y="5250000"/>
-            <a:ext cx="90000" cy="850000"/>
-          </a:xfrm>
-          <a:prstGeom prst="rect">
-            <a:avLst/>
-          </a:prstGeom>
-          <a:solidFill>
-            <a:srgbClr val="CC0000"/>
-          </a:solidFill>
-          <a:ln>
-            <a:noFill/>
-          </a:ln>
-        </p:spPr>
-        <p:style>
-          <a:lnRef idx="1">
-            <a:schemeClr val="accent1"/>
-          </a:lnRef>
-          <a:fillRef idx="3">
-            <a:schemeClr val="accent1"/>
-          </a:fillRef>
-          <a:effectRef idx="2">
-            <a:schemeClr val="accent1"/>
-          </a:effectRef>
-          <a:fontRef idx="minor">
-            <a:schemeClr val="lt1"/>
-          </a:fontRef>
-        </p:style>
-        <p:txBody>
-          <a:bodyPr rtlCol="0" anchor="ctr"/>
-          <a:lstStyle/>
-          <a:p>
-            <a:pPr algn="ctr"/>
-          </a:p>
-        </p:txBody>
-      </p:sp>
-      <p:sp>
-        <p:nvSpPr>
-          <p:cNvPr id="22" name="TextBox 21"/>
-          <p:cNvSpPr txBox="1"/>
-          <p:nvPr/>
-        </p:nvSpPr>
-        <p:spPr>
-          <a:xfrm>
-            <a:off x="1000000" y="5350000"/>
-            <a:ext cx="10400000" cy="650000"/>
-          </a:xfrm>
-          <a:prstGeom prst="rect">
-            <a:avLst/>
-          </a:prstGeom>
-          <a:noFill/>
-        </p:spPr>
-        <p:txBody>
-          <a:bodyPr wrap="square" anchor="ctr">
-            <a:spAutoFit/>
-          </a:bodyPr>
-          <a:lstStyle/>
-          <a:p>
-            <a:pPr algn="l"/>
+              <a:t>•  увеличивать, уменьшать или повторять дозу</a:t>
+            </a:r>
+          </a:p>
+          <a:p>
+            <a:pPr algn="l">
+              <a:spcAft>
+                <a:spcPts val="800"/>
+              </a:spcAft>
+            </a:pPr>
             <a:r>
               <a:rPr sz="1300" b="0">
                 <a:solidFill>
@@ -7188,7 +9617,25 @@
                 <a:ea typeface="Open Sans"/>
                 <a:cs typeface="Open Sans"/>
               </a:rPr>
-              <a:t>Помогите достать и запить</a:t>
+              <a:t>•  заставлять человека принять лекарство</a:t>
+            </a:r>
+          </a:p>
+          <a:p>
+            <a:pPr algn="l">
+              <a:spcAft>
+                <a:spcPts val="800"/>
+              </a:spcAft>
+            </a:pPr>
+            <a:r>
+              <a:rPr sz="1300" b="0">
+                <a:solidFill>
+                  <a:srgbClr val="333333"/>
+                </a:solidFill>
+                <a:latin typeface="Open Sans"/>
+                <a:ea typeface="Open Sans"/>
+                <a:cs typeface="Open Sans"/>
+              </a:rPr>
+              <a:t>•  заменять вызов скорой помощи приемом препарата</a:t>
             </a:r>
           </a:p>
         </p:txBody>
@@ -7286,7 +9733,7 @@
                 <a:ea typeface="Open Sans"/>
                 <a:cs typeface="Open Sans"/>
               </a:rPr>
-              <a:t>ПАМЯТКА</a:t>
+              <a:t>СОЗНАНИЕ И БЕЗОПАСНОЕ ГЛОТАНИЕ</a:t>
             </a:r>
           </a:p>
         </p:txBody>
@@ -7451,30 +9898,119 @@
           </a:p>
         </p:txBody>
       </p:sp>
-      <p:pic>
-        <p:nvPicPr>
-          <p:cNvPr id="8" name="Picture 7" descr="pamyatka-tema4-lekarstva-16x9.png"/>
-          <p:cNvPicPr>
-            <a:picLocks noChangeAspect="1"/>
-          </p:cNvPicPr>
-          <p:nvPr/>
-        </p:nvPicPr>
-        <p:blipFill>
-          <a:blip r:embed="rId2"/>
-          <a:stretch>
-            <a:fillRect/>
-          </a:stretch>
-        </p:blipFill>
-        <p:spPr>
-          <a:xfrm>
-            <a:off x="2300000" y="1400000"/>
-            <a:ext cx="7800000" cy="5200000"/>
-          </a:xfrm>
-          <a:prstGeom prst="rect">
-            <a:avLst/>
-          </a:prstGeom>
-        </p:spPr>
-      </p:pic>
+      <p:sp>
+        <p:nvSpPr>
+          <p:cNvPr id="8" name="TextBox 7"/>
+          <p:cNvSpPr txBox="1"/>
+          <p:nvPr/>
+        </p:nvSpPr>
+        <p:spPr>
+          <a:xfrm>
+            <a:off x="700000" y="1450000"/>
+            <a:ext cx="11000000" cy="4000000"/>
+          </a:xfrm>
+          <a:prstGeom prst="rect">
+            <a:avLst/>
+          </a:prstGeom>
+          <a:noFill/>
+        </p:spPr>
+        <p:txBody>
+          <a:bodyPr wrap="square">
+            <a:spAutoFit/>
+          </a:bodyPr>
+          <a:lstStyle/>
+          <a:p>
+            <a:pPr algn="l">
+              <a:spcAft>
+                <a:spcPts val="800"/>
+              </a:spcAft>
+            </a:pPr>
+            <a:r>
+              <a:rPr sz="1400" b="1">
+                <a:solidFill>
+                  <a:srgbClr val="CC0000"/>
+                </a:solidFill>
+                <a:latin typeface="Open Sans"/>
+                <a:ea typeface="Open Sans"/>
+                <a:cs typeface="Open Sans"/>
+              </a:rPr>
+              <a:t>•  Человеку без сознания ничего не дают через рот.</a:t>
+            </a:r>
+          </a:p>
+          <a:p>
+            <a:pPr algn="l">
+              <a:spcAft>
+                <a:spcPts val="800"/>
+              </a:spcAft>
+            </a:pPr>
+            <a:r>
+              <a:rPr sz="1400" b="1">
+                <a:solidFill>
+                  <a:srgbClr val="CC0000"/>
+                </a:solidFill>
+                <a:latin typeface="Open Sans"/>
+                <a:ea typeface="Open Sans"/>
+                <a:cs typeface="Open Sans"/>
+              </a:rPr>
+              <a:t>•  При выраженной сонливости, спутанности или судорогах прием через рот опасен.</a:t>
+            </a:r>
+          </a:p>
+          <a:p>
+            <a:pPr algn="l">
+              <a:spcAft>
+                <a:spcPts val="800"/>
+              </a:spcAft>
+            </a:pPr>
+            <a:r>
+              <a:rPr sz="1400" b="1">
+                <a:solidFill>
+                  <a:srgbClr val="CC0000"/>
+                </a:solidFill>
+                <a:latin typeface="Open Sans"/>
+                <a:ea typeface="Open Sans"/>
+                <a:cs typeface="Open Sans"/>
+              </a:rPr>
+              <a:t>•  При нарушении глотания вода, таблетка или жидкость могут попасть в дыхательные пути.</a:t>
+            </a:r>
+          </a:p>
+          <a:p>
+            <a:pPr algn="l">
+              <a:spcAft>
+                <a:spcPts val="800"/>
+              </a:spcAft>
+            </a:pPr>
+            <a:r>
+              <a:rPr sz="1400" b="1">
+                <a:solidFill>
+                  <a:srgbClr val="CC0000"/>
+                </a:solidFill>
+                <a:latin typeface="Open Sans"/>
+                <a:ea typeface="Open Sans"/>
+                <a:cs typeface="Open Sans"/>
+              </a:rPr>
+              <a:t>•  Не вкладывайте таблетку под язык и не впрыскивайте препарат без подтвержденного назначения.</a:t>
+            </a:r>
+          </a:p>
+          <a:p>
+            <a:pPr algn="l">
+              <a:spcAft>
+                <a:spcPts val="800"/>
+              </a:spcAft>
+            </a:pPr>
+            <a:r>
+              <a:rPr sz="1400" b="1">
+                <a:solidFill>
+                  <a:srgbClr val="CC0000"/>
+                </a:solidFill>
+                <a:latin typeface="Open Sans"/>
+                <a:ea typeface="Open Sans"/>
+                <a:cs typeface="Open Sans"/>
+              </a:rPr>
+              <a:t>•  При ухудшении сначала оцените дыхание и вызовите скорую помощь.</a:t>
+            </a:r>
+          </a:p>
+        </p:txBody>
+      </p:sp>
     </p:spTree>
   </p:cSld>
   <p:clrMapOvr>
@@ -7502,13 +10038,13 @@
         <p:spPr>
           <a:xfrm>
             <a:off x="0" y="0"/>
-            <a:ext cx="3400000" cy="6858000"/>
+            <a:ext cx="12191695" cy="6858000"/>
           </a:xfrm>
           <a:prstGeom prst="rect">
             <a:avLst/>
           </a:prstGeom>
           <a:solidFill>
-            <a:srgbClr val="DDDDDD"/>
+            <a:srgbClr val="FFFFFF"/>
           </a:solidFill>
           <a:ln>
             <a:noFill/>
@@ -7538,20 +10074,57 @@
       </p:sp>
       <p:sp>
         <p:nvSpPr>
-          <p:cNvPr id="3" name="Rectangle 2"/>
+          <p:cNvPr id="3" name="TextBox 2"/>
+          <p:cNvSpPr txBox="1"/>
+          <p:nvPr/>
+        </p:nvSpPr>
+        <p:spPr>
+          <a:xfrm>
+            <a:off x="700000" y="250000"/>
+            <a:ext cx="11200000" cy="550000"/>
+          </a:xfrm>
+          <a:prstGeom prst="rect">
+            <a:avLst/>
+          </a:prstGeom>
+          <a:noFill/>
+        </p:spPr>
+        <p:txBody>
+          <a:bodyPr wrap="square" anchor="t">
+            <a:spAutoFit/>
+          </a:bodyPr>
+          <a:lstStyle/>
+          <a:p>
+            <a:pPr algn="l"/>
+            <a:r>
+              <a:rPr sz="2200" b="1">
+                <a:solidFill>
+                  <a:srgbClr val="333333"/>
+                </a:solidFill>
+                <a:latin typeface="Open Sans"/>
+                <a:ea typeface="Open Sans"/>
+                <a:cs typeface="Open Sans"/>
+              </a:rPr>
+              <a:t>ПОСЛЕ ПРИЕМА ПРЕПАРАТА</a:t>
+            </a:r>
+          </a:p>
+        </p:txBody>
+      </p:sp>
+      <p:sp>
+        <p:nvSpPr>
+          <p:cNvPr id="4" name="Rectangle 3"/>
           <p:cNvSpPr/>
           <p:nvPr/>
         </p:nvSpPr>
         <p:spPr>
           <a:xfrm>
-            <a:off x="3400000" y="0"/>
-            <a:ext cx="8800000" cy="6858000"/>
+            <a:off x="700000" y="850000"/>
+            <a:ext cx="9000000" cy="28000"/>
           </a:xfrm>
           <a:prstGeom prst="rect">
             <a:avLst/>
           </a:prstGeom>
           <a:solidFill>
-            <a:srgbClr val="F8F8F8"/>
+            <a:srgbClr val="555555"/>
           </a:solidFill>
           <a:ln>
             <a:noFill/>
@@ -7581,14 +10154,14 @@
       </p:sp>
       <p:sp>
         <p:nvSpPr>
-          <p:cNvPr id="4" name="TextBox 3"/>
+          <p:cNvPr id="5" name="TextBox 4"/>
           <p:cNvSpPr txBox="1"/>
           <p:nvPr/>
         </p:nvSpPr>
         <p:spPr>
           <a:xfrm>
-            <a:off x="4000000" y="3000000"/>
-            <a:ext cx="7500000" cy="1000000"/>
+            <a:off x="700000" y="920000"/>
+            <a:ext cx="11000000" cy="350000"/>
           </a:xfrm>
           <a:prstGeom prst="rect">
             <a:avLst/>
@@ -7596,42 +10169,42 @@
           <a:noFill/>
         </p:spPr>
         <p:txBody>
-          <a:bodyPr wrap="square" anchor="ctr">
+          <a:bodyPr wrap="square" anchor="t">
             <a:spAutoFit/>
           </a:bodyPr>
           <a:lstStyle/>
           <a:p>
             <a:pPr algn="l"/>
             <a:r>
-              <a:rPr sz="3000" b="1">
-                <a:solidFill>
-                  <a:srgbClr val="333333"/>
-                </a:solidFill>
-                <a:latin typeface="Open Sans"/>
-                <a:ea typeface="Open Sans"/>
-                <a:cs typeface="Open Sans"/>
-              </a:rPr>
-              <a:t>БЛАГОДАРИМ ЗА ВНИМАНИЕ</a:t>
-            </a:r>
-          </a:p>
-        </p:txBody>
-      </p:sp>
-      <p:sp>
-        <p:nvSpPr>
-          <p:cNvPr id="5" name="Rectangle 4"/>
+              <a:rPr sz="1200" b="0">
+                <a:solidFill>
+                  <a:srgbClr val="666666"/>
+                </a:solidFill>
+                <a:latin typeface="Open Sans"/>
+                <a:ea typeface="Open Sans"/>
+                <a:cs typeface="Open Sans"/>
+              </a:rPr>
+              <a:t>Оказание первой помощи при травмах, ранениях и поражениях, прочих состояниях</a:t>
+            </a:r>
+          </a:p>
+        </p:txBody>
+      </p:sp>
+      <p:sp>
+        <p:nvSpPr>
+          <p:cNvPr id="6" name="Rectangle 5"/>
           <p:cNvSpPr/>
           <p:nvPr/>
         </p:nvSpPr>
         <p:spPr>
           <a:xfrm>
-            <a:off x="4000000" y="4100000"/>
-            <a:ext cx="4500000" cy="30000"/>
+            <a:off x="0" y="2800000"/>
+            <a:ext cx="420000" cy="420000"/>
           </a:xfrm>
           <a:prstGeom prst="rect">
             <a:avLst/>
           </a:prstGeom>
           <a:solidFill>
-            <a:srgbClr val="333333"/>
+            <a:srgbClr val="555555"/>
           </a:solidFill>
           <a:ln>
             <a:noFill/>
@@ -7656,6 +10229,174 @@
           <a:lstStyle/>
           <a:p>
             <a:pPr algn="ctr"/>
+          </a:p>
+        </p:txBody>
+      </p:sp>
+      <p:sp>
+        <p:nvSpPr>
+          <p:cNvPr id="7" name="TextBox 6"/>
+          <p:cNvSpPr txBox="1"/>
+          <p:nvPr/>
+        </p:nvSpPr>
+        <p:spPr>
+          <a:xfrm>
+            <a:off x="0" y="2800000"/>
+            <a:ext cx="420000" cy="420000"/>
+          </a:xfrm>
+          <a:prstGeom prst="rect">
+            <a:avLst/>
+          </a:prstGeom>
+          <a:noFill/>
+        </p:spPr>
+        <p:txBody>
+          <a:bodyPr wrap="square" anchor="ctr">
+            <a:spAutoFit/>
+          </a:bodyPr>
+          <a:lstStyle/>
+          <a:p>
+            <a:pPr algn="ctr"/>
+            <a:r>
+              <a:rPr sz="1400" b="1">
+                <a:solidFill>
+                  <a:srgbClr val="FFFFFF"/>
+                </a:solidFill>
+                <a:latin typeface="Open Sans"/>
+                <a:ea typeface="Open Sans"/>
+                <a:cs typeface="Open Sans"/>
+              </a:rPr>
+              <a:t>9</a:t>
+            </a:r>
+          </a:p>
+        </p:txBody>
+      </p:sp>
+      <p:sp>
+        <p:nvSpPr>
+          <p:cNvPr id="8" name="TextBox 7"/>
+          <p:cNvSpPr txBox="1"/>
+          <p:nvPr/>
+        </p:nvSpPr>
+        <p:spPr>
+          <a:xfrm>
+            <a:off x="700000" y="1450000"/>
+            <a:ext cx="11000000" cy="4000000"/>
+          </a:xfrm>
+          <a:prstGeom prst="rect">
+            <a:avLst/>
+          </a:prstGeom>
+          <a:noFill/>
+        </p:spPr>
+        <p:txBody>
+          <a:bodyPr wrap="square">
+            <a:spAutoFit/>
+          </a:bodyPr>
+          <a:lstStyle/>
+          <a:p>
+            <a:pPr algn="l">
+              <a:spcAft>
+                <a:spcPts val="800"/>
+              </a:spcAft>
+            </a:pPr>
+            <a:r>
+              <a:rPr sz="1400" b="0">
+                <a:solidFill>
+                  <a:srgbClr val="333333"/>
+                </a:solidFill>
+                <a:latin typeface="Open Sans"/>
+                <a:ea typeface="Open Sans"/>
+                <a:cs typeface="Open Sans"/>
+              </a:rPr>
+              <a:t>•  Запомните или запишите название, дозу и точное время приема.</a:t>
+            </a:r>
+          </a:p>
+          <a:p>
+            <a:pPr algn="l">
+              <a:spcAft>
+                <a:spcPts val="800"/>
+              </a:spcAft>
+            </a:pPr>
+            <a:r>
+              <a:rPr sz="1400" b="0">
+                <a:solidFill>
+                  <a:srgbClr val="333333"/>
+                </a:solidFill>
+                <a:latin typeface="Open Sans"/>
+                <a:ea typeface="Open Sans"/>
+                <a:cs typeface="Open Sans"/>
+              </a:rPr>
+              <a:t>•  Не оставляйте пострадавшего одного.</a:t>
+            </a:r>
+          </a:p>
+          <a:p>
+            <a:pPr algn="l">
+              <a:spcAft>
+                <a:spcPts val="800"/>
+              </a:spcAft>
+            </a:pPr>
+            <a:r>
+              <a:rPr sz="1400" b="0">
+                <a:solidFill>
+                  <a:srgbClr val="333333"/>
+                </a:solidFill>
+                <a:latin typeface="Open Sans"/>
+                <a:ea typeface="Open Sans"/>
+                <a:cs typeface="Open Sans"/>
+              </a:rPr>
+              <a:t>•  Контролируйте сознание, дыхание и основные жалобы.</a:t>
+            </a:r>
+          </a:p>
+          <a:p>
+            <a:pPr algn="l">
+              <a:spcAft>
+                <a:spcPts val="800"/>
+              </a:spcAft>
+            </a:pPr>
+            <a:r>
+              <a:rPr sz="1400" b="0">
+                <a:solidFill>
+                  <a:srgbClr val="333333"/>
+                </a:solidFill>
+                <a:latin typeface="Open Sans"/>
+                <a:ea typeface="Open Sans"/>
+                <a:cs typeface="Open Sans"/>
+              </a:rPr>
+              <a:t>•  Не давайте дополнительную дозу, если эффект не наступил сразу.</a:t>
+            </a:r>
+          </a:p>
+          <a:p>
+            <a:pPr algn="l">
+              <a:spcAft>
+                <a:spcPts val="800"/>
+              </a:spcAft>
+            </a:pPr>
+            <a:r>
+              <a:rPr sz="1400" b="0">
+                <a:solidFill>
+                  <a:srgbClr val="333333"/>
+                </a:solidFill>
+                <a:latin typeface="Open Sans"/>
+                <a:ea typeface="Open Sans"/>
+                <a:cs typeface="Open Sans"/>
+              </a:rPr>
+              <a:t>•  При ухудшении повторно свяжитесь с диспетчером скорой помощи.</a:t>
+            </a:r>
+          </a:p>
+          <a:p>
+            <a:pPr algn="l">
+              <a:spcAft>
+                <a:spcPts val="800"/>
+              </a:spcAft>
+            </a:pPr>
+            <a:r>
+              <a:rPr sz="1400" b="0">
+                <a:solidFill>
+                  <a:srgbClr val="333333"/>
+                </a:solidFill>
+                <a:latin typeface="Open Sans"/>
+                <a:ea typeface="Open Sans"/>
+                <a:cs typeface="Open Sans"/>
+              </a:rPr>
+              <a:t>•  Сохраните упаковку и инструкцию для прибывших специалистов.</a:t>
+            </a:r>
           </a:p>
         </p:txBody>
       </p:sp>
